--- a/スライド/ch03.pptx
+++ b/スライド/ch03.pptx
@@ -618,13 +618,13 @@
           <a:lstStyle/>
           <a:p>
             <a:r>
-              <a:t>段階開示。①で「平均が P」、②で「往復の振幅が Q」、③で「1 つの複素数に両方を入れる」。共役を付ける理由（θ_v − θ_i にするため）は必ず聞かれる。</a:t>
+              <a:t>前の 1 枚に ② を足しただけ。薄い段はまだ出していない段。</a:t>
             </a:r>
           </a:p>
           <a:p/>
           <a:p>
             <a:r>
-              <a:t>_class: sections</a:t>
+              <a:t>_class: figure-full</a:t>
             </a:r>
           </a:p>
         </p:txBody>
@@ -694,13 +694,13 @@
           <a:lstStyle/>
           <a:p>
             <a:r>
-              <a:t>段階開示。①で「平均が P」、②で「往復の振幅が Q」、③で「1 つの複素数に両方を入れる」。共役を付ける理由（θ_v − θ_i にするため）は必ず聞かれる。</a:t>
+              <a:t>前の 1 枚に ③ を足しただけ。薄い段はまだ出していない段。</a:t>
             </a:r>
           </a:p>
           <a:p/>
           <a:p>
             <a:r>
-              <a:t>_class: sections</a:t>
+              <a:t>_class: figure-full</a:t>
             </a:r>
           </a:p>
         </p:txBody>
@@ -1752,7 +1752,7 @@
           <a:p/>
           <a:p>
             <a:r>
-              <a:t>_class: sections</a:t>
+              <a:t>_class: figure-full</a:t>
             </a:r>
           </a:p>
         </p:txBody>
@@ -1822,13 +1822,13 @@
           <a:lstStyle/>
           <a:p>
             <a:r>
-              <a:t>②の √3 が消える理由を板書で 1 回やる。ここを飛ばすと「Z_base = V²/S に √3 が要るか」で毎年迷う。③は容量比が S_new/S_old（大きい基準ほど p.u. は大きい）。</a:t>
+              <a:t>前の 1 枚に ② を足しただけ。薄い段はまだ出していない段。</a:t>
             </a:r>
           </a:p>
           <a:p/>
           <a:p>
             <a:r>
-              <a:t>_class: sections</a:t>
+              <a:t>_class: figure-full</a:t>
             </a:r>
           </a:p>
         </p:txBody>
@@ -1898,13 +1898,13 @@
           <a:lstStyle/>
           <a:p>
             <a:r>
-              <a:t>②の √3 が消える理由を板書で 1 回やる。ここを飛ばすと「Z_base = V²/S に √3 が要るか」で毎年迷う。③は容量比が S_new/S_old（大きい基準ほど p.u. は大きい）。</a:t>
+              <a:t>前の 1 枚に ③ を足しただけ。薄い段はまだ出していない段。</a:t>
             </a:r>
           </a:p>
           <a:p/>
           <a:p>
             <a:r>
-              <a:t>_class: sections</a:t>
+              <a:t>_class: figure-full</a:t>
             </a:r>
           </a:p>
         </p:txBody>
@@ -2354,7 +2354,7 @@
           <a:p/>
           <a:p>
             <a:r>
-              <a:t>_class: sections</a:t>
+              <a:t>_class: figure-full</a:t>
             </a:r>
           </a:p>
         </p:txBody>
@@ -2424,13 +2424,13 @@
           <a:lstStyle/>
           <a:p>
             <a:r>
-              <a:t>段階開示。②の共役で ∠δ が ∠−δ になる点と、1/(−j) = j を丁寧に。③の近似 2 行が「P–δ / Q–V 分離」で、第5回の高速デカップル法・第8回の周波数制御 vs 第6回の電圧制御の役割分担の根拠。この式は暗記。</a:t>
+              <a:t>前の 1 枚に ② を足しただけ。薄い段はまだ出していない段。</a:t>
             </a:r>
           </a:p>
           <a:p/>
           <a:p>
             <a:r>
-              <a:t>_class: sections</a:t>
+              <a:t>_class: figure-full</a:t>
             </a:r>
           </a:p>
         </p:txBody>
@@ -2500,13 +2500,13 @@
           <a:lstStyle/>
           <a:p>
             <a:r>
-              <a:t>段階開示。②の共役で ∠δ が ∠−δ になる点と、1/(−j) = j を丁寧に。③の近似 2 行が「P–δ / Q–V 分離」で、第5回の高速デカップル法・第8回の周波数制御 vs 第6回の電圧制御の役割分担の根拠。この式は暗記。</a:t>
+              <a:t>前の 1 枚に ③ を足しただけ。薄い段はまだ出していない段。</a:t>
             </a:r>
           </a:p>
           <a:p/>
           <a:p>
             <a:r>
-              <a:t>_class: sections</a:t>
+              <a:t>_class: figure-full</a:t>
             </a:r>
           </a:p>
         </p:txBody>
@@ -3540,7 +3540,7 @@
           <a:p/>
           <a:p>
             <a:r>
-              <a:t>_class: sections</a:t>
+              <a:t>_class: figure-full</a:t>
             </a:r>
           </a:p>
         </p:txBody>
@@ -7501,59 +7501,14 @@
       <p:grpSpPr/>
       <p:sp>
         <p:nvSpPr>
-          <p:cNvPr id="2" name="TextBox 1"/>
+          <p:cNvPr id="2" name="edge:title"/>
           <p:cNvSpPr txBox="1"/>
           <p:nvPr/>
         </p:nvSpPr>
         <p:spPr>
           <a:xfrm>
-            <a:off x="566928" y="457200"/>
-            <a:ext cx="11057839" cy="658368"/>
-          </a:xfrm>
-          <a:prstGeom prst="rect">
-            <a:avLst/>
-          </a:prstGeom>
-          <a:noFill/>
-        </p:spPr>
-        <p:txBody>
-          <a:bodyPr wrap="square" lIns="0" rIns="0" tIns="0" bIns="0" anchor="ctr">
-            <a:noAutofit/>
-          </a:bodyPr>
-          <a:lstStyle/>
-          <a:p>
-            <a:pPr>
-              <a:lnSpc>
-                <a:spcPct val="106000"/>
-              </a:lnSpc>
-              <a:defRPr sz="3390" b="1">
-                <a:solidFill>
-                  <a:srgbClr val="7C332A"/>
-                </a:solidFill>
-                <a:latin typeface="Avenir Next"/>
-                <a:ea typeface="Hiragino Sans"/>
-                <a:cs typeface="Hiragino Sans"/>
-              </a:defRPr>
-            </a:pPr>
-            <a:r>
-              <a:rPr>
-                <a:ea typeface="Hiragino Sans"/>
-                <a:cs typeface="Hiragino Sans"/>
-              </a:rPr>
-              <a:t>導出 — v·i から S = P + jQ へ</a:t>
-            </a:r>
-          </a:p>
-        </p:txBody>
-      </p:sp>
-      <p:sp>
-        <p:nvSpPr>
-          <p:cNvPr id="3" name="TextBox 2"/>
-          <p:cNvSpPr txBox="1"/>
-          <p:nvPr/>
-        </p:nvSpPr>
-        <p:spPr>
-          <a:xfrm>
-            <a:off x="566928" y="2075212"/>
-            <a:ext cx="11057839" cy="254000"/>
+            <a:off x="566928" y="146304"/>
+            <a:ext cx="11057839" cy="457200"/>
           </a:xfrm>
           <a:prstGeom prst="rect">
             <a:avLst/>
@@ -7566,30 +7521,60 @@
           </a:bodyPr>
           <a:lstStyle/>
           <a:p>
-            <a:r>
-              <a:rPr sz="1600" b="1">
-                <a:solidFill>
-                  <a:srgbClr val="5C7268"/>
-                </a:solidFill>
-                <a:latin typeface="Avenir Next"/>
-                <a:ea typeface="Hiragino Sans"/>
-                <a:cs typeface="Hiragino Sans"/>
-              </a:rPr>
-              <a:t>① 瞬時電力｜v = √2 V sin ωt、i = √2 I sin(ωt − φ) の積</a:t>
-            </a:r>
-          </a:p>
-        </p:txBody>
-      </p:sp>
-      <p:sp>
-        <p:nvSpPr>
-          <p:cNvPr id="4" name="TextBox 3"/>
+            <a:pPr>
+              <a:defRPr sz="2400" b="1">
+                <a:solidFill>
+                  <a:srgbClr val="7C332A"/>
+                </a:solidFill>
+                <a:latin typeface="Avenir Next"/>
+                <a:ea typeface="Hiragino Sans"/>
+                <a:cs typeface="Hiragino Sans"/>
+              </a:defRPr>
+            </a:pPr>
+            <a:r>
+              <a:rPr>
+                <a:ea typeface="Hiragino Sans"/>
+                <a:cs typeface="Hiragino Sans"/>
+              </a:rPr>
+              <a:t>導出 — v·i から S = P + jQ へ</a:t>
+            </a:r>
+          </a:p>
+        </p:txBody>
+      </p:sp>
+      <p:pic>
+        <p:nvPicPr>
+          <p:cNvPr id="3" name="Picture 2" descr="ch03_deriv_spower_2.png"/>
+          <p:cNvPicPr>
+            <a:picLocks noChangeAspect="1"/>
+          </p:cNvPicPr>
+          <p:nvPr/>
+        </p:nvPicPr>
+        <p:blipFill>
+          <a:blip r:embed="rId2"/>
+          <a:stretch>
+            <a:fillRect/>
+          </a:stretch>
+        </p:blipFill>
+        <p:spPr>
+          <a:xfrm>
+            <a:off x="762110" y="713232"/>
+            <a:ext cx="10667474" cy="5322316"/>
+          </a:xfrm>
+          <a:prstGeom prst="rect">
+            <a:avLst/>
+          </a:prstGeom>
+        </p:spPr>
+      </p:pic>
+      <p:sp>
+        <p:nvSpPr>
+          <p:cNvPr id="4" name="edge:caption"/>
           <p:cNvSpPr txBox="1"/>
           <p:nvPr/>
         </p:nvSpPr>
         <p:spPr>
           <a:xfrm>
-            <a:off x="822960" y="2367312"/>
-            <a:ext cx="10801807" cy="695325"/>
+            <a:off x="228600" y="6090412"/>
+            <a:ext cx="11734495" cy="520700"/>
           </a:xfrm>
           <a:prstGeom prst="rect">
             <a:avLst/>
@@ -7602,303 +7587,24 @@
           </a:bodyPr>
           <a:lstStyle/>
           <a:p>
-            <a:pPr>
-              <a:lnSpc>
-                <a:spcPct val="130000"/>
-              </a:lnSpc>
-            </a:pPr>
-            <a:r>
-              <a:rPr sz="1500">
-                <a:solidFill>
-                  <a:srgbClr val="33221E"/>
-                </a:solidFill>
-                <a:latin typeface="Avenir Next"/>
-                <a:ea typeface="Hiragino Sans"/>
-                <a:cs typeface="Hiragino Sans"/>
-              </a:rPr>
-              <a:t>積和の公式 2 sinA sinB = cos(A − B) − cos(A + B) より p(t) = VI cos φ − VI cos(2ωt − φ)。平均は VI cos φ で、これが有効電力 P。</a:t>
-            </a:r>
-          </a:p>
-        </p:txBody>
-      </p:sp>
-      <p:sp>
-        <p:nvSpPr>
-          <p:cNvPr id="5" name="Rectangle 4"/>
-          <p:cNvSpPr/>
-          <p:nvPr/>
-        </p:nvSpPr>
-        <p:spPr>
-          <a:xfrm>
-            <a:off x="566928" y="3214529"/>
-            <a:ext cx="11057839" cy="9525"/>
-          </a:xfrm>
-          <a:prstGeom prst="rect">
-            <a:avLst/>
-          </a:prstGeom>
-          <a:solidFill>
-            <a:srgbClr val="E5DCCE"/>
-          </a:solidFill>
-          <a:ln>
-            <a:noFill/>
-          </a:ln>
-          <a:effectLst/>
-        </p:spPr>
-        <p:style>
-          <a:lnRef idx="1">
-            <a:schemeClr val="accent1"/>
-          </a:lnRef>
-          <a:fillRef idx="3">
-            <a:schemeClr val="accent1"/>
-          </a:fillRef>
-          <a:effectRef idx="2">
-            <a:schemeClr val="accent1"/>
-          </a:effectRef>
-          <a:fontRef idx="minor">
-            <a:schemeClr val="lt1"/>
-          </a:fontRef>
-        </p:style>
-        <p:txBody>
-          <a:bodyPr rtlCol="0" anchor="ctr"/>
-          <a:lstStyle/>
-          <a:p>
             <a:pPr algn="ctr"/>
-          </a:p>
-        </p:txBody>
-      </p:sp>
-      <p:sp>
-        <p:nvSpPr>
-          <p:cNvPr id="6" name="TextBox 5"/>
-          <p:cNvSpPr txBox="1"/>
-          <p:nvPr/>
-        </p:nvSpPr>
-        <p:spPr>
-          <a:xfrm>
-            <a:off x="566928" y="3391821"/>
-            <a:ext cx="11057839" cy="254000"/>
-          </a:xfrm>
-          <a:prstGeom prst="rect">
-            <a:avLst/>
-          </a:prstGeom>
-          <a:noFill/>
-        </p:spPr>
-        <p:txBody>
-          <a:bodyPr wrap="none" lIns="0" rIns="0" tIns="0" bIns="0">
-            <a:noAutofit/>
-          </a:bodyPr>
-          <a:lstStyle/>
-          <a:p>
-            <a:r>
-              <a:rPr sz="1600" b="1">
-                <a:solidFill>
-                  <a:srgbClr val="5C7268"/>
-                </a:solidFill>
-                <a:latin typeface="Avenir Next"/>
-                <a:ea typeface="Hiragino Sans"/>
-                <a:cs typeface="Hiragino Sans"/>
-              </a:rPr>
-              <a:t>② 分解｜cos(2ωt − φ) を展開して 2 つの項に分ける</a:t>
-            </a:r>
-          </a:p>
-        </p:txBody>
-      </p:sp>
-      <p:sp>
-        <p:nvSpPr>
-          <p:cNvPr id="7" name="TextBox 6"/>
-          <p:cNvSpPr txBox="1"/>
-          <p:nvPr/>
-        </p:nvSpPr>
-        <p:spPr>
-          <a:xfrm>
-            <a:off x="822960" y="3683921"/>
-            <a:ext cx="10801807" cy="385762"/>
-          </a:xfrm>
-          <a:prstGeom prst="rect">
-            <a:avLst/>
-          </a:prstGeom>
-          <a:noFill/>
-        </p:spPr>
-        <p:txBody>
-          <a:bodyPr wrap="square" lIns="0" rIns="0" tIns="0" bIns="0">
-            <a:noAutofit/>
-          </a:bodyPr>
-          <a:lstStyle/>
-          <a:p>
-            <a:pPr>
-              <a:lnSpc>
-                <a:spcPct val="130000"/>
-              </a:lnSpc>
-            </a:pPr>
-            <a:r>
-              <a:rPr sz="1500" b="1">
-                <a:solidFill>
-                  <a:srgbClr val="33221E"/>
-                </a:solidFill>
-                <a:latin typeface="Avenir Next"/>
-                <a:ea typeface="Hiragino Sans"/>
-                <a:cs typeface="Hiragino Sans"/>
-              </a:rPr>
-              <a:t>p(t) = P(1 − cos 2ωt) − Q sin 2ωt</a:t>
-            </a:r>
-            <a:r>
-              <a:rPr sz="1500">
-                <a:solidFill>
-                  <a:srgbClr val="33221E"/>
-                </a:solidFill>
-                <a:latin typeface="Avenir Next"/>
-                <a:ea typeface="Hiragino Sans"/>
-                <a:cs typeface="Hiragino Sans"/>
-              </a:rPr>
-              <a:t>、P = VI cos φ、Q = VI sin φ。第 1 項は常に 0 以上で平均 P。第 2 項は平均 0 で振幅 Q。</a:t>
-            </a:r>
-          </a:p>
-        </p:txBody>
-      </p:sp>
-      <p:sp>
-        <p:nvSpPr>
-          <p:cNvPr id="8" name="Rectangle 7"/>
-          <p:cNvSpPr/>
-          <p:nvPr/>
-        </p:nvSpPr>
-        <p:spPr>
-          <a:xfrm>
-            <a:off x="566928" y="4221575"/>
-            <a:ext cx="11057839" cy="9525"/>
-          </a:xfrm>
-          <a:prstGeom prst="rect">
-            <a:avLst/>
-          </a:prstGeom>
-          <a:solidFill>
-            <a:srgbClr val="E5DCCE"/>
-          </a:solidFill>
-          <a:ln>
-            <a:noFill/>
-          </a:ln>
-          <a:effectLst/>
-        </p:spPr>
-        <p:style>
-          <a:lnRef idx="1">
-            <a:schemeClr val="accent1"/>
-          </a:lnRef>
-          <a:fillRef idx="3">
-            <a:schemeClr val="accent1"/>
-          </a:fillRef>
-          <a:effectRef idx="2">
-            <a:schemeClr val="accent1"/>
-          </a:effectRef>
-          <a:fontRef idx="minor">
-            <a:schemeClr val="lt1"/>
-          </a:fontRef>
-        </p:style>
-        <p:txBody>
-          <a:bodyPr rtlCol="0" anchor="ctr"/>
-          <a:lstStyle/>
-          <a:p>
-            <a:pPr algn="ctr"/>
-          </a:p>
-        </p:txBody>
-      </p:sp>
-      <p:sp>
-        <p:nvSpPr>
-          <p:cNvPr id="9" name="build:ghost"/>
-          <p:cNvSpPr txBox="1"/>
-          <p:nvPr/>
-        </p:nvSpPr>
-        <p:spPr>
-          <a:xfrm>
-            <a:off x="566928" y="4398867"/>
-            <a:ext cx="11057839" cy="254000"/>
-          </a:xfrm>
-          <a:prstGeom prst="rect">
-            <a:avLst/>
-          </a:prstGeom>
-          <a:noFill/>
-        </p:spPr>
-        <p:txBody>
-          <a:bodyPr wrap="none" lIns="0" rIns="0" tIns="0" bIns="0">
-            <a:noAutofit/>
-          </a:bodyPr>
-          <a:lstStyle/>
-          <a:p>
-            <a:r>
-              <a:rPr sz="1600" b="1">
-                <a:solidFill>
-                  <a:srgbClr val="C1C9C5"/>
-                </a:solidFill>
-                <a:latin typeface="Avenir Next"/>
-                <a:ea typeface="Hiragino Sans"/>
-                <a:cs typeface="Hiragino Sans"/>
-              </a:rPr>
-              <a:t>③ フェーザで｜S = V̇ İ* = VI∠(θ_v − θ_i) = VI∠φ</a:t>
-            </a:r>
-          </a:p>
-        </p:txBody>
-      </p:sp>
-      <p:sp>
-        <p:nvSpPr>
-          <p:cNvPr id="10" name="build:ghost"/>
-          <p:cNvSpPr txBox="1"/>
-          <p:nvPr/>
-        </p:nvSpPr>
-        <p:spPr>
-          <a:xfrm>
-            <a:off x="822960" y="4690967"/>
-            <a:ext cx="10801807" cy="695325"/>
-          </a:xfrm>
-          <a:prstGeom prst="rect">
-            <a:avLst/>
-          </a:prstGeom>
-          <a:noFill/>
-        </p:spPr>
-        <p:txBody>
-          <a:bodyPr wrap="square" lIns="0" rIns="0" tIns="0" bIns="0">
-            <a:noAutofit/>
-          </a:bodyPr>
-          <a:lstStyle/>
-          <a:p>
-            <a:pPr>
-              <a:lnSpc>
-                <a:spcPct val="130000"/>
-              </a:lnSpc>
-            </a:pPr>
-            <a:r>
-              <a:rPr sz="1500">
-                <a:solidFill>
-                  <a:srgbClr val="C1BCBB"/>
-                </a:solidFill>
-                <a:latin typeface="Avenir Next"/>
-                <a:ea typeface="Hiragino Sans"/>
-                <a:cs typeface="Hiragino Sans"/>
-              </a:rPr>
-              <a:t>共役を取るから角度が φ になる。</a:t>
-            </a:r>
-            <a:r>
-              <a:rPr sz="1500" b="1">
-                <a:solidFill>
-                  <a:srgbClr val="C1BCBB"/>
-                </a:solidFill>
-                <a:latin typeface="Avenir Next"/>
-                <a:ea typeface="Hiragino Sans"/>
-                <a:cs typeface="Hiragino Sans"/>
-              </a:rPr>
-              <a:t>S = VI cos φ + j VI sin φ = P + jQ</a:t>
-            </a:r>
-            <a:r>
-              <a:rPr sz="1500">
-                <a:solidFill>
-                  <a:srgbClr val="C1BCBB"/>
-                </a:solidFill>
-                <a:latin typeface="Avenir Next"/>
-                <a:ea typeface="Hiragino Sans"/>
-                <a:cs typeface="Hiragino Sans"/>
-              </a:rPr>
-              <a:t>。遅れ負荷（誘導性）は Q &gt; 0、進み（コンデンサ）は Q &lt; 0 と約束する。</a:t>
-            </a:r>
-          </a:p>
-        </p:txBody>
-      </p:sp>
-      <p:sp>
-        <p:nvSpPr>
-          <p:cNvPr id="11" name="TextBox 10"/>
+            <a:r>
+              <a:rPr sz="1400">
+                <a:solidFill>
+                  <a:srgbClr val="71635B"/>
+                </a:solidFill>
+                <a:latin typeface="Avenir Next"/>
+                <a:ea typeface="Hiragino Sans"/>
+                <a:cs typeface="Hiragino Sans"/>
+              </a:rPr>
+              <a:t>p(t) = P(1 − cos 2ωt) − Q sin 2ωt、P = VI cos φ、Q = VI sin φ。第 1 項は常に 0 以上で平均 P。第 2 項は平均 0 で振幅 Q。　出典｜コード/fig_ch03.py</a:t>
+            </a:r>
+          </a:p>
+        </p:txBody>
+      </p:sp>
+      <p:sp>
+        <p:nvSpPr>
+          <p:cNvPr id="5" name="TextBox 4"/>
           <p:cNvSpPr txBox="1"/>
           <p:nvPr/>
         </p:nvSpPr>
@@ -7954,59 +7660,14 @@
       <p:grpSpPr/>
       <p:sp>
         <p:nvSpPr>
-          <p:cNvPr id="2" name="TextBox 1"/>
+          <p:cNvPr id="2" name="edge:title"/>
           <p:cNvSpPr txBox="1"/>
           <p:nvPr/>
         </p:nvSpPr>
         <p:spPr>
           <a:xfrm>
-            <a:off x="566928" y="457200"/>
-            <a:ext cx="11057839" cy="658368"/>
-          </a:xfrm>
-          <a:prstGeom prst="rect">
-            <a:avLst/>
-          </a:prstGeom>
-          <a:noFill/>
-        </p:spPr>
-        <p:txBody>
-          <a:bodyPr wrap="square" lIns="0" rIns="0" tIns="0" bIns="0" anchor="ctr">
-            <a:noAutofit/>
-          </a:bodyPr>
-          <a:lstStyle/>
-          <a:p>
-            <a:pPr>
-              <a:lnSpc>
-                <a:spcPct val="106000"/>
-              </a:lnSpc>
-              <a:defRPr sz="3390" b="1">
-                <a:solidFill>
-                  <a:srgbClr val="7C332A"/>
-                </a:solidFill>
-                <a:latin typeface="Avenir Next"/>
-                <a:ea typeface="Hiragino Sans"/>
-                <a:cs typeface="Hiragino Sans"/>
-              </a:defRPr>
-            </a:pPr>
-            <a:r>
-              <a:rPr>
-                <a:ea typeface="Hiragino Sans"/>
-                <a:cs typeface="Hiragino Sans"/>
-              </a:rPr>
-              <a:t>導出 — v·i から S = P + jQ へ</a:t>
-            </a:r>
-          </a:p>
-        </p:txBody>
-      </p:sp>
-      <p:sp>
-        <p:nvSpPr>
-          <p:cNvPr id="3" name="TextBox 2"/>
-          <p:cNvSpPr txBox="1"/>
-          <p:nvPr/>
-        </p:nvSpPr>
-        <p:spPr>
-          <a:xfrm>
-            <a:off x="566928" y="2075212"/>
-            <a:ext cx="11057839" cy="254000"/>
+            <a:off x="566928" y="146304"/>
+            <a:ext cx="11057839" cy="457200"/>
           </a:xfrm>
           <a:prstGeom prst="rect">
             <a:avLst/>
@@ -8019,30 +7680,60 @@
           </a:bodyPr>
           <a:lstStyle/>
           <a:p>
-            <a:r>
-              <a:rPr sz="1600" b="1">
-                <a:solidFill>
-                  <a:srgbClr val="5C7268"/>
-                </a:solidFill>
-                <a:latin typeface="Avenir Next"/>
-                <a:ea typeface="Hiragino Sans"/>
-                <a:cs typeface="Hiragino Sans"/>
-              </a:rPr>
-              <a:t>① 瞬時電力｜v = √2 V sin ωt、i = √2 I sin(ωt − φ) の積</a:t>
-            </a:r>
-          </a:p>
-        </p:txBody>
-      </p:sp>
-      <p:sp>
-        <p:nvSpPr>
-          <p:cNvPr id="4" name="TextBox 3"/>
+            <a:pPr>
+              <a:defRPr sz="2400" b="1">
+                <a:solidFill>
+                  <a:srgbClr val="7C332A"/>
+                </a:solidFill>
+                <a:latin typeface="Avenir Next"/>
+                <a:ea typeface="Hiragino Sans"/>
+                <a:cs typeface="Hiragino Sans"/>
+              </a:defRPr>
+            </a:pPr>
+            <a:r>
+              <a:rPr>
+                <a:ea typeface="Hiragino Sans"/>
+                <a:cs typeface="Hiragino Sans"/>
+              </a:rPr>
+              <a:t>導出 — v·i から S = P + jQ へ</a:t>
+            </a:r>
+          </a:p>
+        </p:txBody>
+      </p:sp>
+      <p:pic>
+        <p:nvPicPr>
+          <p:cNvPr id="3" name="Picture 2" descr="ch03_deriv_spower_3.png"/>
+          <p:cNvPicPr>
+            <a:picLocks noChangeAspect="1"/>
+          </p:cNvPicPr>
+          <p:nvPr/>
+        </p:nvPicPr>
+        <p:blipFill>
+          <a:blip r:embed="rId2"/>
+          <a:stretch>
+            <a:fillRect/>
+          </a:stretch>
+        </p:blipFill>
+        <p:spPr>
+          <a:xfrm>
+            <a:off x="762110" y="713232"/>
+            <a:ext cx="10667474" cy="5322316"/>
+          </a:xfrm>
+          <a:prstGeom prst="rect">
+            <a:avLst/>
+          </a:prstGeom>
+        </p:spPr>
+      </p:pic>
+      <p:sp>
+        <p:nvSpPr>
+          <p:cNvPr id="4" name="edge:caption"/>
           <p:cNvSpPr txBox="1"/>
           <p:nvPr/>
         </p:nvSpPr>
         <p:spPr>
           <a:xfrm>
-            <a:off x="822960" y="2367312"/>
-            <a:ext cx="10801807" cy="695325"/>
+            <a:off x="228600" y="6090412"/>
+            <a:ext cx="11734495" cy="520700"/>
           </a:xfrm>
           <a:prstGeom prst="rect">
             <a:avLst/>
@@ -8055,303 +7746,24 @@
           </a:bodyPr>
           <a:lstStyle/>
           <a:p>
-            <a:pPr>
-              <a:lnSpc>
-                <a:spcPct val="130000"/>
-              </a:lnSpc>
-            </a:pPr>
-            <a:r>
-              <a:rPr sz="1500">
-                <a:solidFill>
-                  <a:srgbClr val="33221E"/>
-                </a:solidFill>
-                <a:latin typeface="Avenir Next"/>
-                <a:ea typeface="Hiragino Sans"/>
-                <a:cs typeface="Hiragino Sans"/>
-              </a:rPr>
-              <a:t>積和の公式 2 sinA sinB = cos(A − B) − cos(A + B) より p(t) = VI cos φ − VI cos(2ωt − φ)。平均は VI cos φ で、これが有効電力 P。</a:t>
-            </a:r>
-          </a:p>
-        </p:txBody>
-      </p:sp>
-      <p:sp>
-        <p:nvSpPr>
-          <p:cNvPr id="5" name="Rectangle 4"/>
-          <p:cNvSpPr/>
-          <p:nvPr/>
-        </p:nvSpPr>
-        <p:spPr>
-          <a:xfrm>
-            <a:off x="566928" y="3214529"/>
-            <a:ext cx="11057839" cy="9525"/>
-          </a:xfrm>
-          <a:prstGeom prst="rect">
-            <a:avLst/>
-          </a:prstGeom>
-          <a:solidFill>
-            <a:srgbClr val="E5DCCE"/>
-          </a:solidFill>
-          <a:ln>
-            <a:noFill/>
-          </a:ln>
-          <a:effectLst/>
-        </p:spPr>
-        <p:style>
-          <a:lnRef idx="1">
-            <a:schemeClr val="accent1"/>
-          </a:lnRef>
-          <a:fillRef idx="3">
-            <a:schemeClr val="accent1"/>
-          </a:fillRef>
-          <a:effectRef idx="2">
-            <a:schemeClr val="accent1"/>
-          </a:effectRef>
-          <a:fontRef idx="minor">
-            <a:schemeClr val="lt1"/>
-          </a:fontRef>
-        </p:style>
-        <p:txBody>
-          <a:bodyPr rtlCol="0" anchor="ctr"/>
-          <a:lstStyle/>
-          <a:p>
             <a:pPr algn="ctr"/>
-          </a:p>
-        </p:txBody>
-      </p:sp>
-      <p:sp>
-        <p:nvSpPr>
-          <p:cNvPr id="6" name="TextBox 5"/>
-          <p:cNvSpPr txBox="1"/>
-          <p:nvPr/>
-        </p:nvSpPr>
-        <p:spPr>
-          <a:xfrm>
-            <a:off x="566928" y="3391821"/>
-            <a:ext cx="11057839" cy="254000"/>
-          </a:xfrm>
-          <a:prstGeom prst="rect">
-            <a:avLst/>
-          </a:prstGeom>
-          <a:noFill/>
-        </p:spPr>
-        <p:txBody>
-          <a:bodyPr wrap="none" lIns="0" rIns="0" tIns="0" bIns="0">
-            <a:noAutofit/>
-          </a:bodyPr>
-          <a:lstStyle/>
-          <a:p>
-            <a:r>
-              <a:rPr sz="1600" b="1">
-                <a:solidFill>
-                  <a:srgbClr val="5C7268"/>
-                </a:solidFill>
-                <a:latin typeface="Avenir Next"/>
-                <a:ea typeface="Hiragino Sans"/>
-                <a:cs typeface="Hiragino Sans"/>
-              </a:rPr>
-              <a:t>② 分解｜cos(2ωt − φ) を展開して 2 つの項に分ける</a:t>
-            </a:r>
-          </a:p>
-        </p:txBody>
-      </p:sp>
-      <p:sp>
-        <p:nvSpPr>
-          <p:cNvPr id="7" name="TextBox 6"/>
-          <p:cNvSpPr txBox="1"/>
-          <p:nvPr/>
-        </p:nvSpPr>
-        <p:spPr>
-          <a:xfrm>
-            <a:off x="822960" y="3683921"/>
-            <a:ext cx="10801807" cy="385762"/>
-          </a:xfrm>
-          <a:prstGeom prst="rect">
-            <a:avLst/>
-          </a:prstGeom>
-          <a:noFill/>
-        </p:spPr>
-        <p:txBody>
-          <a:bodyPr wrap="square" lIns="0" rIns="0" tIns="0" bIns="0">
-            <a:noAutofit/>
-          </a:bodyPr>
-          <a:lstStyle/>
-          <a:p>
-            <a:pPr>
-              <a:lnSpc>
-                <a:spcPct val="130000"/>
-              </a:lnSpc>
-            </a:pPr>
-            <a:r>
-              <a:rPr sz="1500" b="1">
-                <a:solidFill>
-                  <a:srgbClr val="33221E"/>
-                </a:solidFill>
-                <a:latin typeface="Avenir Next"/>
-                <a:ea typeface="Hiragino Sans"/>
-                <a:cs typeface="Hiragino Sans"/>
-              </a:rPr>
-              <a:t>p(t) = P(1 − cos 2ωt) − Q sin 2ωt</a:t>
-            </a:r>
-            <a:r>
-              <a:rPr sz="1500">
-                <a:solidFill>
-                  <a:srgbClr val="33221E"/>
-                </a:solidFill>
-                <a:latin typeface="Avenir Next"/>
-                <a:ea typeface="Hiragino Sans"/>
-                <a:cs typeface="Hiragino Sans"/>
-              </a:rPr>
-              <a:t>、P = VI cos φ、Q = VI sin φ。第 1 項は常に 0 以上で平均 P。第 2 項は平均 0 で振幅 Q。</a:t>
-            </a:r>
-          </a:p>
-        </p:txBody>
-      </p:sp>
-      <p:sp>
-        <p:nvSpPr>
-          <p:cNvPr id="8" name="Rectangle 7"/>
-          <p:cNvSpPr/>
-          <p:nvPr/>
-        </p:nvSpPr>
-        <p:spPr>
-          <a:xfrm>
-            <a:off x="566928" y="4221575"/>
-            <a:ext cx="11057839" cy="9525"/>
-          </a:xfrm>
-          <a:prstGeom prst="rect">
-            <a:avLst/>
-          </a:prstGeom>
-          <a:solidFill>
-            <a:srgbClr val="E5DCCE"/>
-          </a:solidFill>
-          <a:ln>
-            <a:noFill/>
-          </a:ln>
-          <a:effectLst/>
-        </p:spPr>
-        <p:style>
-          <a:lnRef idx="1">
-            <a:schemeClr val="accent1"/>
-          </a:lnRef>
-          <a:fillRef idx="3">
-            <a:schemeClr val="accent1"/>
-          </a:fillRef>
-          <a:effectRef idx="2">
-            <a:schemeClr val="accent1"/>
-          </a:effectRef>
-          <a:fontRef idx="minor">
-            <a:schemeClr val="lt1"/>
-          </a:fontRef>
-        </p:style>
-        <p:txBody>
-          <a:bodyPr rtlCol="0" anchor="ctr"/>
-          <a:lstStyle/>
-          <a:p>
-            <a:pPr algn="ctr"/>
-          </a:p>
-        </p:txBody>
-      </p:sp>
-      <p:sp>
-        <p:nvSpPr>
-          <p:cNvPr id="9" name="TextBox 8"/>
-          <p:cNvSpPr txBox="1"/>
-          <p:nvPr/>
-        </p:nvSpPr>
-        <p:spPr>
-          <a:xfrm>
-            <a:off x="566928" y="4398867"/>
-            <a:ext cx="11057839" cy="254000"/>
-          </a:xfrm>
-          <a:prstGeom prst="rect">
-            <a:avLst/>
-          </a:prstGeom>
-          <a:noFill/>
-        </p:spPr>
-        <p:txBody>
-          <a:bodyPr wrap="none" lIns="0" rIns="0" tIns="0" bIns="0">
-            <a:noAutofit/>
-          </a:bodyPr>
-          <a:lstStyle/>
-          <a:p>
-            <a:r>
-              <a:rPr sz="1600" b="1">
-                <a:solidFill>
-                  <a:srgbClr val="5C7268"/>
-                </a:solidFill>
-                <a:latin typeface="Avenir Next"/>
-                <a:ea typeface="Hiragino Sans"/>
-                <a:cs typeface="Hiragino Sans"/>
-              </a:rPr>
-              <a:t>③ フェーザで｜S = V̇ İ* = VI∠(θ_v − θ_i) = VI∠φ</a:t>
-            </a:r>
-          </a:p>
-        </p:txBody>
-      </p:sp>
-      <p:sp>
-        <p:nvSpPr>
-          <p:cNvPr id="10" name="TextBox 9"/>
-          <p:cNvSpPr txBox="1"/>
-          <p:nvPr/>
-        </p:nvSpPr>
-        <p:spPr>
-          <a:xfrm>
-            <a:off x="822960" y="4690967"/>
-            <a:ext cx="10801807" cy="695325"/>
-          </a:xfrm>
-          <a:prstGeom prst="rect">
-            <a:avLst/>
-          </a:prstGeom>
-          <a:noFill/>
-        </p:spPr>
-        <p:txBody>
-          <a:bodyPr wrap="square" lIns="0" rIns="0" tIns="0" bIns="0">
-            <a:noAutofit/>
-          </a:bodyPr>
-          <a:lstStyle/>
-          <a:p>
-            <a:pPr>
-              <a:lnSpc>
-                <a:spcPct val="130000"/>
-              </a:lnSpc>
-            </a:pPr>
-            <a:r>
-              <a:rPr sz="1500">
-                <a:solidFill>
-                  <a:srgbClr val="33221E"/>
-                </a:solidFill>
-                <a:latin typeface="Avenir Next"/>
-                <a:ea typeface="Hiragino Sans"/>
-                <a:cs typeface="Hiragino Sans"/>
-              </a:rPr>
-              <a:t>共役を取るから角度が φ になる。</a:t>
-            </a:r>
-            <a:r>
-              <a:rPr sz="1500" b="1">
-                <a:solidFill>
-                  <a:srgbClr val="33221E"/>
-                </a:solidFill>
-                <a:latin typeface="Avenir Next"/>
-                <a:ea typeface="Hiragino Sans"/>
-                <a:cs typeface="Hiragino Sans"/>
-              </a:rPr>
-              <a:t>S = VI cos φ + j VI sin φ = P + jQ</a:t>
-            </a:r>
-            <a:r>
-              <a:rPr sz="1500">
-                <a:solidFill>
-                  <a:srgbClr val="33221E"/>
-                </a:solidFill>
-                <a:latin typeface="Avenir Next"/>
-                <a:ea typeface="Hiragino Sans"/>
-                <a:cs typeface="Hiragino Sans"/>
-              </a:rPr>
-              <a:t>。遅れ負荷（誘導性）は Q &gt; 0、進み（コンデンサ）は Q &lt; 0 と約束する。</a:t>
-            </a:r>
-          </a:p>
-        </p:txBody>
-      </p:sp>
-      <p:sp>
-        <p:nvSpPr>
-          <p:cNvPr id="11" name="TextBox 10"/>
+            <a:r>
+              <a:rPr sz="1400">
+                <a:solidFill>
+                  <a:srgbClr val="71635B"/>
+                </a:solidFill>
+                <a:latin typeface="Avenir Next"/>
+                <a:ea typeface="Hiragino Sans"/>
+                <a:cs typeface="Hiragino Sans"/>
+              </a:rPr>
+              <a:t>共役を取るから角度が φ になる。S = VI cos φ + j VI sin φ = P + jQ。遅れ負荷（誘導性）は Q &gt; 0、進み（コンデンサ）は Q &lt; 0 と約束する。　出典｜コード/fig_ch03.py</a:t>
+            </a:r>
+          </a:p>
+        </p:txBody>
+      </p:sp>
+      <p:sp>
+        <p:nvSpPr>
+          <p:cNvPr id="5" name="TextBox 4"/>
           <p:cNvSpPr txBox="1"/>
           <p:nvPr/>
         </p:nvSpPr>
@@ -14928,59 +14340,14 @@
       <p:grpSpPr/>
       <p:sp>
         <p:nvSpPr>
-          <p:cNvPr id="2" name="TextBox 1"/>
+          <p:cNvPr id="2" name="edge:title"/>
           <p:cNvSpPr txBox="1"/>
           <p:nvPr/>
         </p:nvSpPr>
         <p:spPr>
           <a:xfrm>
-            <a:off x="566928" y="457200"/>
-            <a:ext cx="11057839" cy="658368"/>
-          </a:xfrm>
-          <a:prstGeom prst="rect">
-            <a:avLst/>
-          </a:prstGeom>
-          <a:noFill/>
-        </p:spPr>
-        <p:txBody>
-          <a:bodyPr wrap="square" lIns="0" rIns="0" tIns="0" bIns="0" anchor="ctr">
-            <a:noAutofit/>
-          </a:bodyPr>
-          <a:lstStyle/>
-          <a:p>
-            <a:pPr>
-              <a:lnSpc>
-                <a:spcPct val="106000"/>
-              </a:lnSpc>
-              <a:defRPr sz="3390" b="1">
-                <a:solidFill>
-                  <a:srgbClr val="7C332A"/>
-                </a:solidFill>
-                <a:latin typeface="Avenir Next"/>
-                <a:ea typeface="Hiragino Sans"/>
-                <a:cs typeface="Hiragino Sans"/>
-              </a:defRPr>
-            </a:pPr>
-            <a:r>
-              <a:rPr>
-                <a:ea typeface="Hiragino Sans"/>
-                <a:cs typeface="Hiragino Sans"/>
-              </a:rPr>
-              <a:t>導出 — Z_base と基準の変換</a:t>
-            </a:r>
-          </a:p>
-        </p:txBody>
-      </p:sp>
-      <p:sp>
-        <p:nvSpPr>
-          <p:cNvPr id="3" name="TextBox 2"/>
-          <p:cNvSpPr txBox="1"/>
-          <p:nvPr/>
-        </p:nvSpPr>
-        <p:spPr>
-          <a:xfrm>
-            <a:off x="566928" y="2229993"/>
-            <a:ext cx="11057839" cy="254000"/>
+            <a:off x="566928" y="146304"/>
+            <a:ext cx="11057839" cy="457200"/>
           </a:xfrm>
           <a:prstGeom prst="rect">
             <a:avLst/>
@@ -14993,30 +14360,60 @@
           </a:bodyPr>
           <a:lstStyle/>
           <a:p>
-            <a:r>
-              <a:rPr sz="1600" b="1">
-                <a:solidFill>
-                  <a:srgbClr val="5C7268"/>
-                </a:solidFill>
-                <a:latin typeface="Avenir Next"/>
-                <a:ea typeface="Hiragino Sans"/>
-                <a:cs typeface="Hiragino Sans"/>
-              </a:rPr>
-              <a:t>① 基準は 2 つだけ｜S_base（三相合計）と V_base（線間）を選ぶ</a:t>
-            </a:r>
-          </a:p>
-        </p:txBody>
-      </p:sp>
-      <p:sp>
-        <p:nvSpPr>
-          <p:cNvPr id="4" name="TextBox 3"/>
+            <a:pPr>
+              <a:defRPr sz="2400" b="1">
+                <a:solidFill>
+                  <a:srgbClr val="7C332A"/>
+                </a:solidFill>
+                <a:latin typeface="Avenir Next"/>
+                <a:ea typeface="Hiragino Sans"/>
+                <a:cs typeface="Hiragino Sans"/>
+              </a:defRPr>
+            </a:pPr>
+            <a:r>
+              <a:rPr>
+                <a:ea typeface="Hiragino Sans"/>
+                <a:cs typeface="Hiragino Sans"/>
+              </a:rPr>
+              <a:t>導出 — Z_base と基準の変換</a:t>
+            </a:r>
+          </a:p>
+        </p:txBody>
+      </p:sp>
+      <p:pic>
+        <p:nvPicPr>
+          <p:cNvPr id="3" name="Picture 2" descr="ch03_deriv_zbase_1.png"/>
+          <p:cNvPicPr>
+            <a:picLocks noChangeAspect="1"/>
+          </p:cNvPicPr>
+          <p:nvPr/>
+        </p:nvPicPr>
+        <p:blipFill>
+          <a:blip r:embed="rId2"/>
+          <a:stretch>
+            <a:fillRect/>
+          </a:stretch>
+        </p:blipFill>
+        <p:spPr>
+          <a:xfrm>
+            <a:off x="228600" y="754238"/>
+            <a:ext cx="11734495" cy="5450107"/>
+          </a:xfrm>
+          <a:prstGeom prst="rect">
+            <a:avLst/>
+          </a:prstGeom>
+        </p:spPr>
+      </p:pic>
+      <p:sp>
+        <p:nvSpPr>
+          <p:cNvPr id="4" name="edge:caption"/>
           <p:cNvSpPr txBox="1"/>
           <p:nvPr/>
         </p:nvSpPr>
         <p:spPr>
           <a:xfrm>
-            <a:off x="822960" y="2522093"/>
-            <a:ext cx="10801807" cy="385762"/>
+            <a:off x="228600" y="6300216"/>
+            <a:ext cx="11734495" cy="310896"/>
           </a:xfrm>
           <a:prstGeom prst="rect">
             <a:avLst/>
@@ -15029,325 +14426,24 @@
           </a:bodyPr>
           <a:lstStyle/>
           <a:p>
-            <a:pPr>
-              <a:lnSpc>
-                <a:spcPct val="130000"/>
-              </a:lnSpc>
-            </a:pPr>
-            <a:r>
-              <a:rPr sz="1500">
-                <a:solidFill>
-                  <a:srgbClr val="33221E"/>
-                </a:solidFill>
-                <a:latin typeface="Avenir Next"/>
-                <a:ea typeface="Hiragino Sans"/>
-                <a:cs typeface="Hiragino Sans"/>
-              </a:rPr>
-              <a:t>残りは自動で決まる。</a:t>
-            </a:r>
-            <a:r>
-              <a:rPr sz="1500" b="1">
-                <a:solidFill>
-                  <a:srgbClr val="33221E"/>
-                </a:solidFill>
-                <a:latin typeface="Avenir Next"/>
-                <a:ea typeface="Hiragino Sans"/>
-                <a:cs typeface="Hiragino Sans"/>
-              </a:rPr>
-              <a:t>I_base = S_base/(√3 V_base)</a:t>
-            </a:r>
-            <a:r>
-              <a:rPr sz="1500">
-                <a:solidFill>
-                  <a:srgbClr val="33221E"/>
-                </a:solidFill>
-                <a:latin typeface="Avenir Next"/>
-                <a:ea typeface="Hiragino Sans"/>
-                <a:cs typeface="Hiragino Sans"/>
-              </a:rPr>
-              <a:t>。三相基準と単相基準を混ぜないこと。</a:t>
-            </a:r>
-          </a:p>
-        </p:txBody>
-      </p:sp>
-      <p:sp>
-        <p:nvSpPr>
-          <p:cNvPr id="5" name="Rectangle 4"/>
-          <p:cNvSpPr/>
-          <p:nvPr/>
-        </p:nvSpPr>
-        <p:spPr>
-          <a:xfrm>
-            <a:off x="566928" y="3059747"/>
-            <a:ext cx="11057839" cy="9525"/>
-          </a:xfrm>
-          <a:prstGeom prst="rect">
-            <a:avLst/>
-          </a:prstGeom>
-          <a:solidFill>
-            <a:srgbClr val="E5DCCE"/>
-          </a:solidFill>
-          <a:ln>
-            <a:noFill/>
-          </a:ln>
-          <a:effectLst/>
-        </p:spPr>
-        <p:style>
-          <a:lnRef idx="1">
-            <a:schemeClr val="accent1"/>
-          </a:lnRef>
-          <a:fillRef idx="3">
-            <a:schemeClr val="accent1"/>
-          </a:fillRef>
-          <a:effectRef idx="2">
-            <a:schemeClr val="accent1"/>
-          </a:effectRef>
-          <a:fontRef idx="minor">
-            <a:schemeClr val="lt1"/>
-          </a:fontRef>
-        </p:style>
-        <p:txBody>
-          <a:bodyPr rtlCol="0" anchor="ctr"/>
-          <a:lstStyle/>
-          <a:p>
             <a:pPr algn="ctr"/>
-          </a:p>
-        </p:txBody>
-      </p:sp>
-      <p:sp>
-        <p:nvSpPr>
-          <p:cNvPr id="6" name="build:ghost"/>
-          <p:cNvSpPr txBox="1"/>
-          <p:nvPr/>
-        </p:nvSpPr>
-        <p:spPr>
-          <a:xfrm>
-            <a:off x="566928" y="3237039"/>
-            <a:ext cx="11057839" cy="254000"/>
-          </a:xfrm>
-          <a:prstGeom prst="rect">
-            <a:avLst/>
-          </a:prstGeom>
-          <a:noFill/>
-        </p:spPr>
-        <p:txBody>
-          <a:bodyPr wrap="none" lIns="0" rIns="0" tIns="0" bIns="0">
-            <a:noAutofit/>
-          </a:bodyPr>
-          <a:lstStyle/>
-          <a:p>
-            <a:r>
-              <a:rPr sz="1600" b="1">
-                <a:solidFill>
-                  <a:srgbClr val="C1C9C5"/>
-                </a:solidFill>
-                <a:latin typeface="Avenir Next"/>
-                <a:ea typeface="Hiragino Sans"/>
-                <a:cs typeface="Hiragino Sans"/>
-              </a:rPr>
-              <a:t>② Z_base｜相電圧 ÷ 電流 = (V_base/√3)/I_base</a:t>
-            </a:r>
-          </a:p>
-        </p:txBody>
-      </p:sp>
-      <p:sp>
-        <p:nvSpPr>
-          <p:cNvPr id="7" name="build:ghost"/>
-          <p:cNvSpPr txBox="1"/>
-          <p:nvPr/>
-        </p:nvSpPr>
-        <p:spPr>
-          <a:xfrm>
-            <a:off x="822960" y="3529139"/>
-            <a:ext cx="10801807" cy="385762"/>
-          </a:xfrm>
-          <a:prstGeom prst="rect">
-            <a:avLst/>
-          </a:prstGeom>
-          <a:noFill/>
-        </p:spPr>
-        <p:txBody>
-          <a:bodyPr wrap="square" lIns="0" rIns="0" tIns="0" bIns="0">
-            <a:noAutofit/>
-          </a:bodyPr>
-          <a:lstStyle/>
-          <a:p>
-            <a:pPr>
-              <a:lnSpc>
-                <a:spcPct val="130000"/>
-              </a:lnSpc>
-            </a:pPr>
-            <a:r>
-              <a:rPr sz="1500">
-                <a:solidFill>
-                  <a:srgbClr val="C1BCBB"/>
-                </a:solidFill>
-                <a:latin typeface="Avenir Next"/>
-                <a:ea typeface="Hiragino Sans"/>
-                <a:cs typeface="Hiragino Sans"/>
-              </a:rPr>
-              <a:t>= (V_base/√3) × √3 V_base/S_base = </a:t>
-            </a:r>
-            <a:r>
-              <a:rPr sz="1500" b="1">
-                <a:solidFill>
-                  <a:srgbClr val="C1BCBB"/>
-                </a:solidFill>
-                <a:latin typeface="Avenir Next"/>
-                <a:ea typeface="Hiragino Sans"/>
-                <a:cs typeface="Hiragino Sans"/>
-              </a:rPr>
-              <a:t>V_base²/S_base</a:t>
-            </a:r>
-            <a:r>
-              <a:rPr sz="1500">
-                <a:solidFill>
-                  <a:srgbClr val="C1BCBB"/>
-                </a:solidFill>
-                <a:latin typeface="Avenir Next"/>
-                <a:ea typeface="Hiragino Sans"/>
-                <a:cs typeface="Hiragino Sans"/>
-              </a:rPr>
-              <a:t>。√3 が約分で消える。66 kV・100 MVA なら 43.6 Ω、875 A。</a:t>
-            </a:r>
-          </a:p>
-        </p:txBody>
-      </p:sp>
-      <p:sp>
-        <p:nvSpPr>
-          <p:cNvPr id="8" name="Rectangle 7"/>
-          <p:cNvSpPr/>
-          <p:nvPr/>
-        </p:nvSpPr>
-        <p:spPr>
-          <a:xfrm>
-            <a:off x="566928" y="4066793"/>
-            <a:ext cx="11057839" cy="9525"/>
-          </a:xfrm>
-          <a:prstGeom prst="rect">
-            <a:avLst/>
-          </a:prstGeom>
-          <a:solidFill>
-            <a:srgbClr val="E5DCCE"/>
-          </a:solidFill>
-          <a:ln>
-            <a:noFill/>
-          </a:ln>
-          <a:effectLst/>
-        </p:spPr>
-        <p:style>
-          <a:lnRef idx="1">
-            <a:schemeClr val="accent1"/>
-          </a:lnRef>
-          <a:fillRef idx="3">
-            <a:schemeClr val="accent1"/>
-          </a:fillRef>
-          <a:effectRef idx="2">
-            <a:schemeClr val="accent1"/>
-          </a:effectRef>
-          <a:fontRef idx="minor">
-            <a:schemeClr val="lt1"/>
-          </a:fontRef>
-        </p:style>
-        <p:txBody>
-          <a:bodyPr rtlCol="0" anchor="ctr"/>
-          <a:lstStyle/>
-          <a:p>
-            <a:pPr algn="ctr"/>
-          </a:p>
-        </p:txBody>
-      </p:sp>
-      <p:sp>
-        <p:nvSpPr>
-          <p:cNvPr id="9" name="build:ghost"/>
-          <p:cNvSpPr txBox="1"/>
-          <p:nvPr/>
-        </p:nvSpPr>
-        <p:spPr>
-          <a:xfrm>
-            <a:off x="566928" y="4244085"/>
-            <a:ext cx="11057839" cy="254000"/>
-          </a:xfrm>
-          <a:prstGeom prst="rect">
-            <a:avLst/>
-          </a:prstGeom>
-          <a:noFill/>
-        </p:spPr>
-        <p:txBody>
-          <a:bodyPr wrap="none" lIns="0" rIns="0" tIns="0" bIns="0">
-            <a:noAutofit/>
-          </a:bodyPr>
-          <a:lstStyle/>
-          <a:p>
-            <a:r>
-              <a:rPr sz="1600" b="1">
-                <a:solidFill>
-                  <a:srgbClr val="C1C9C5"/>
-                </a:solidFill>
-                <a:latin typeface="Avenir Next"/>
-                <a:ea typeface="Hiragino Sans"/>
-                <a:cs typeface="Hiragino Sans"/>
-              </a:rPr>
-              <a:t>③ 基準の変換｜機器の銘板値（自己容量基準）を系統基準へ</a:t>
-            </a:r>
-          </a:p>
-        </p:txBody>
-      </p:sp>
-      <p:sp>
-        <p:nvSpPr>
-          <p:cNvPr id="10" name="build:ghost"/>
-          <p:cNvSpPr txBox="1"/>
-          <p:nvPr/>
-        </p:nvSpPr>
-        <p:spPr>
-          <a:xfrm>
-            <a:off x="822960" y="4536185"/>
-            <a:ext cx="10801807" cy="695325"/>
-          </a:xfrm>
-          <a:prstGeom prst="rect">
-            <a:avLst/>
-          </a:prstGeom>
-          <a:noFill/>
-        </p:spPr>
-        <p:txBody>
-          <a:bodyPr wrap="square" lIns="0" rIns="0" tIns="0" bIns="0">
-            <a:noAutofit/>
-          </a:bodyPr>
-          <a:lstStyle/>
-          <a:p>
-            <a:pPr>
-              <a:lnSpc>
-                <a:spcPct val="130000"/>
-              </a:lnSpc>
-            </a:pPr>
-            <a:r>
-              <a:rPr sz="1500" b="1">
-                <a:solidFill>
-                  <a:srgbClr val="C1BCBB"/>
-                </a:solidFill>
-                <a:latin typeface="Avenir Next"/>
-                <a:ea typeface="Hiragino Sans"/>
-                <a:cs typeface="Hiragino Sans"/>
-              </a:rPr>
-              <a:t>Z_new = Z_old (S_new/S_old)(V_old/V_new)²</a:t>
-            </a:r>
-            <a:r>
-              <a:rPr sz="1500">
-                <a:solidFill>
-                  <a:srgbClr val="C1BCBB"/>
-                </a:solidFill>
-                <a:latin typeface="Avenir Next"/>
-                <a:ea typeface="Hiragino Sans"/>
-                <a:cs typeface="Hiragino Sans"/>
-              </a:rPr>
-              <a:t>。60 MVA・%Z 12% の変圧器は 100 MVA 基準で 0.12 × 100/60 = 0.200 p.u.。</a:t>
-            </a:r>
-          </a:p>
-        </p:txBody>
-      </p:sp>
-      <p:sp>
-        <p:nvSpPr>
-          <p:cNvPr id="11" name="TextBox 10"/>
+            <a:r>
+              <a:rPr sz="1400">
+                <a:solidFill>
+                  <a:srgbClr val="71635B"/>
+                </a:solidFill>
+                <a:latin typeface="Avenir Next"/>
+                <a:ea typeface="Hiragino Sans"/>
+                <a:cs typeface="Hiragino Sans"/>
+              </a:rPr>
+              <a:t>残りは自動で決まる。I_base = S_base/(√3 V_base)。三相基準と単相基準を混ぜないこと。　出典｜コード/fig_ch03.py</a:t>
+            </a:r>
+          </a:p>
+        </p:txBody>
+      </p:sp>
+      <p:sp>
+        <p:nvSpPr>
+          <p:cNvPr id="5" name="TextBox 4"/>
           <p:cNvSpPr txBox="1"/>
           <p:nvPr/>
         </p:nvSpPr>
@@ -15403,59 +14499,14 @@
       <p:grpSpPr/>
       <p:sp>
         <p:nvSpPr>
-          <p:cNvPr id="2" name="TextBox 1"/>
+          <p:cNvPr id="2" name="edge:title"/>
           <p:cNvSpPr txBox="1"/>
           <p:nvPr/>
         </p:nvSpPr>
         <p:spPr>
           <a:xfrm>
-            <a:off x="566928" y="457200"/>
-            <a:ext cx="11057839" cy="658368"/>
-          </a:xfrm>
-          <a:prstGeom prst="rect">
-            <a:avLst/>
-          </a:prstGeom>
-          <a:noFill/>
-        </p:spPr>
-        <p:txBody>
-          <a:bodyPr wrap="square" lIns="0" rIns="0" tIns="0" bIns="0" anchor="ctr">
-            <a:noAutofit/>
-          </a:bodyPr>
-          <a:lstStyle/>
-          <a:p>
-            <a:pPr>
-              <a:lnSpc>
-                <a:spcPct val="106000"/>
-              </a:lnSpc>
-              <a:defRPr sz="3390" b="1">
-                <a:solidFill>
-                  <a:srgbClr val="7C332A"/>
-                </a:solidFill>
-                <a:latin typeface="Avenir Next"/>
-                <a:ea typeface="Hiragino Sans"/>
-                <a:cs typeface="Hiragino Sans"/>
-              </a:defRPr>
-            </a:pPr>
-            <a:r>
-              <a:rPr>
-                <a:ea typeface="Hiragino Sans"/>
-                <a:cs typeface="Hiragino Sans"/>
-              </a:rPr>
-              <a:t>導出 — Z_base と基準の変換</a:t>
-            </a:r>
-          </a:p>
-        </p:txBody>
-      </p:sp>
-      <p:sp>
-        <p:nvSpPr>
-          <p:cNvPr id="3" name="TextBox 2"/>
-          <p:cNvSpPr txBox="1"/>
-          <p:nvPr/>
-        </p:nvSpPr>
-        <p:spPr>
-          <a:xfrm>
-            <a:off x="566928" y="2229993"/>
-            <a:ext cx="11057839" cy="254000"/>
+            <a:off x="566928" y="146304"/>
+            <a:ext cx="11057839" cy="457200"/>
           </a:xfrm>
           <a:prstGeom prst="rect">
             <a:avLst/>
@@ -15468,30 +14519,60 @@
           </a:bodyPr>
           <a:lstStyle/>
           <a:p>
-            <a:r>
-              <a:rPr sz="1600" b="1">
-                <a:solidFill>
-                  <a:srgbClr val="5C7268"/>
-                </a:solidFill>
-                <a:latin typeface="Avenir Next"/>
-                <a:ea typeface="Hiragino Sans"/>
-                <a:cs typeface="Hiragino Sans"/>
-              </a:rPr>
-              <a:t>① 基準は 2 つだけ｜S_base（三相合計）と V_base（線間）を選ぶ</a:t>
-            </a:r>
-          </a:p>
-        </p:txBody>
-      </p:sp>
-      <p:sp>
-        <p:nvSpPr>
-          <p:cNvPr id="4" name="TextBox 3"/>
+            <a:pPr>
+              <a:defRPr sz="2400" b="1">
+                <a:solidFill>
+                  <a:srgbClr val="7C332A"/>
+                </a:solidFill>
+                <a:latin typeface="Avenir Next"/>
+                <a:ea typeface="Hiragino Sans"/>
+                <a:cs typeface="Hiragino Sans"/>
+              </a:defRPr>
+            </a:pPr>
+            <a:r>
+              <a:rPr>
+                <a:ea typeface="Hiragino Sans"/>
+                <a:cs typeface="Hiragino Sans"/>
+              </a:rPr>
+              <a:t>導出 — Z_base と基準の変換</a:t>
+            </a:r>
+          </a:p>
+        </p:txBody>
+      </p:sp>
+      <p:pic>
+        <p:nvPicPr>
+          <p:cNvPr id="3" name="Picture 2" descr="ch03_deriv_zbase_2.png"/>
+          <p:cNvPicPr>
+            <a:picLocks noChangeAspect="1"/>
+          </p:cNvPicPr>
+          <p:nvPr/>
+        </p:nvPicPr>
+        <p:blipFill>
+          <a:blip r:embed="rId2"/>
+          <a:stretch>
+            <a:fillRect/>
+          </a:stretch>
+        </p:blipFill>
+        <p:spPr>
+          <a:xfrm>
+            <a:off x="366173" y="713232"/>
+            <a:ext cx="11459349" cy="5322316"/>
+          </a:xfrm>
+          <a:prstGeom prst="rect">
+            <a:avLst/>
+          </a:prstGeom>
+        </p:spPr>
+      </p:pic>
+      <p:sp>
+        <p:nvSpPr>
+          <p:cNvPr id="4" name="edge:caption"/>
           <p:cNvSpPr txBox="1"/>
           <p:nvPr/>
         </p:nvSpPr>
         <p:spPr>
           <a:xfrm>
-            <a:off x="822960" y="2522093"/>
-            <a:ext cx="10801807" cy="385762"/>
+            <a:off x="228600" y="6090412"/>
+            <a:ext cx="11734495" cy="520700"/>
           </a:xfrm>
           <a:prstGeom prst="rect">
             <a:avLst/>
@@ -15504,325 +14585,24 @@
           </a:bodyPr>
           <a:lstStyle/>
           <a:p>
-            <a:pPr>
-              <a:lnSpc>
-                <a:spcPct val="130000"/>
-              </a:lnSpc>
-            </a:pPr>
-            <a:r>
-              <a:rPr sz="1500">
-                <a:solidFill>
-                  <a:srgbClr val="33221E"/>
-                </a:solidFill>
-                <a:latin typeface="Avenir Next"/>
-                <a:ea typeface="Hiragino Sans"/>
-                <a:cs typeface="Hiragino Sans"/>
-              </a:rPr>
-              <a:t>残りは自動で決まる。</a:t>
-            </a:r>
-            <a:r>
-              <a:rPr sz="1500" b="1">
-                <a:solidFill>
-                  <a:srgbClr val="33221E"/>
-                </a:solidFill>
-                <a:latin typeface="Avenir Next"/>
-                <a:ea typeface="Hiragino Sans"/>
-                <a:cs typeface="Hiragino Sans"/>
-              </a:rPr>
-              <a:t>I_base = S_base/(√3 V_base)</a:t>
-            </a:r>
-            <a:r>
-              <a:rPr sz="1500">
-                <a:solidFill>
-                  <a:srgbClr val="33221E"/>
-                </a:solidFill>
-                <a:latin typeface="Avenir Next"/>
-                <a:ea typeface="Hiragino Sans"/>
-                <a:cs typeface="Hiragino Sans"/>
-              </a:rPr>
-              <a:t>。三相基準と単相基準を混ぜないこと。</a:t>
-            </a:r>
-          </a:p>
-        </p:txBody>
-      </p:sp>
-      <p:sp>
-        <p:nvSpPr>
-          <p:cNvPr id="5" name="Rectangle 4"/>
-          <p:cNvSpPr/>
-          <p:nvPr/>
-        </p:nvSpPr>
-        <p:spPr>
-          <a:xfrm>
-            <a:off x="566928" y="3059747"/>
-            <a:ext cx="11057839" cy="9525"/>
-          </a:xfrm>
-          <a:prstGeom prst="rect">
-            <a:avLst/>
-          </a:prstGeom>
-          <a:solidFill>
-            <a:srgbClr val="E5DCCE"/>
-          </a:solidFill>
-          <a:ln>
-            <a:noFill/>
-          </a:ln>
-          <a:effectLst/>
-        </p:spPr>
-        <p:style>
-          <a:lnRef idx="1">
-            <a:schemeClr val="accent1"/>
-          </a:lnRef>
-          <a:fillRef idx="3">
-            <a:schemeClr val="accent1"/>
-          </a:fillRef>
-          <a:effectRef idx="2">
-            <a:schemeClr val="accent1"/>
-          </a:effectRef>
-          <a:fontRef idx="minor">
-            <a:schemeClr val="lt1"/>
-          </a:fontRef>
-        </p:style>
-        <p:txBody>
-          <a:bodyPr rtlCol="0" anchor="ctr"/>
-          <a:lstStyle/>
-          <a:p>
             <a:pPr algn="ctr"/>
-          </a:p>
-        </p:txBody>
-      </p:sp>
-      <p:sp>
-        <p:nvSpPr>
-          <p:cNvPr id="6" name="TextBox 5"/>
-          <p:cNvSpPr txBox="1"/>
-          <p:nvPr/>
-        </p:nvSpPr>
-        <p:spPr>
-          <a:xfrm>
-            <a:off x="566928" y="3237039"/>
-            <a:ext cx="11057839" cy="254000"/>
-          </a:xfrm>
-          <a:prstGeom prst="rect">
-            <a:avLst/>
-          </a:prstGeom>
-          <a:noFill/>
-        </p:spPr>
-        <p:txBody>
-          <a:bodyPr wrap="none" lIns="0" rIns="0" tIns="0" bIns="0">
-            <a:noAutofit/>
-          </a:bodyPr>
-          <a:lstStyle/>
-          <a:p>
-            <a:r>
-              <a:rPr sz="1600" b="1">
-                <a:solidFill>
-                  <a:srgbClr val="5C7268"/>
-                </a:solidFill>
-                <a:latin typeface="Avenir Next"/>
-                <a:ea typeface="Hiragino Sans"/>
-                <a:cs typeface="Hiragino Sans"/>
-              </a:rPr>
-              <a:t>② Z_base｜相電圧 ÷ 電流 = (V_base/√3)/I_base</a:t>
-            </a:r>
-          </a:p>
-        </p:txBody>
-      </p:sp>
-      <p:sp>
-        <p:nvSpPr>
-          <p:cNvPr id="7" name="TextBox 6"/>
-          <p:cNvSpPr txBox="1"/>
-          <p:nvPr/>
-        </p:nvSpPr>
-        <p:spPr>
-          <a:xfrm>
-            <a:off x="822960" y="3529139"/>
-            <a:ext cx="10801807" cy="385762"/>
-          </a:xfrm>
-          <a:prstGeom prst="rect">
-            <a:avLst/>
-          </a:prstGeom>
-          <a:noFill/>
-        </p:spPr>
-        <p:txBody>
-          <a:bodyPr wrap="square" lIns="0" rIns="0" tIns="0" bIns="0">
-            <a:noAutofit/>
-          </a:bodyPr>
-          <a:lstStyle/>
-          <a:p>
-            <a:pPr>
-              <a:lnSpc>
-                <a:spcPct val="130000"/>
-              </a:lnSpc>
-            </a:pPr>
-            <a:r>
-              <a:rPr sz="1500">
-                <a:solidFill>
-                  <a:srgbClr val="33221E"/>
-                </a:solidFill>
-                <a:latin typeface="Avenir Next"/>
-                <a:ea typeface="Hiragino Sans"/>
-                <a:cs typeface="Hiragino Sans"/>
-              </a:rPr>
-              <a:t>= (V_base/√3) × √3 V_base/S_base = </a:t>
-            </a:r>
-            <a:r>
-              <a:rPr sz="1500" b="1">
-                <a:solidFill>
-                  <a:srgbClr val="33221E"/>
-                </a:solidFill>
-                <a:latin typeface="Avenir Next"/>
-                <a:ea typeface="Hiragino Sans"/>
-                <a:cs typeface="Hiragino Sans"/>
-              </a:rPr>
-              <a:t>V_base²/S_base</a:t>
-            </a:r>
-            <a:r>
-              <a:rPr sz="1500">
-                <a:solidFill>
-                  <a:srgbClr val="33221E"/>
-                </a:solidFill>
-                <a:latin typeface="Avenir Next"/>
-                <a:ea typeface="Hiragino Sans"/>
-                <a:cs typeface="Hiragino Sans"/>
-              </a:rPr>
-              <a:t>。√3 が約分で消える。66 kV・100 MVA なら 43.6 Ω、875 A。</a:t>
-            </a:r>
-          </a:p>
-        </p:txBody>
-      </p:sp>
-      <p:sp>
-        <p:nvSpPr>
-          <p:cNvPr id="8" name="Rectangle 7"/>
-          <p:cNvSpPr/>
-          <p:nvPr/>
-        </p:nvSpPr>
-        <p:spPr>
-          <a:xfrm>
-            <a:off x="566928" y="4066793"/>
-            <a:ext cx="11057839" cy="9525"/>
-          </a:xfrm>
-          <a:prstGeom prst="rect">
-            <a:avLst/>
-          </a:prstGeom>
-          <a:solidFill>
-            <a:srgbClr val="E5DCCE"/>
-          </a:solidFill>
-          <a:ln>
-            <a:noFill/>
-          </a:ln>
-          <a:effectLst/>
-        </p:spPr>
-        <p:style>
-          <a:lnRef idx="1">
-            <a:schemeClr val="accent1"/>
-          </a:lnRef>
-          <a:fillRef idx="3">
-            <a:schemeClr val="accent1"/>
-          </a:fillRef>
-          <a:effectRef idx="2">
-            <a:schemeClr val="accent1"/>
-          </a:effectRef>
-          <a:fontRef idx="minor">
-            <a:schemeClr val="lt1"/>
-          </a:fontRef>
-        </p:style>
-        <p:txBody>
-          <a:bodyPr rtlCol="0" anchor="ctr"/>
-          <a:lstStyle/>
-          <a:p>
-            <a:pPr algn="ctr"/>
-          </a:p>
-        </p:txBody>
-      </p:sp>
-      <p:sp>
-        <p:nvSpPr>
-          <p:cNvPr id="9" name="build:ghost"/>
-          <p:cNvSpPr txBox="1"/>
-          <p:nvPr/>
-        </p:nvSpPr>
-        <p:spPr>
-          <a:xfrm>
-            <a:off x="566928" y="4244085"/>
-            <a:ext cx="11057839" cy="254000"/>
-          </a:xfrm>
-          <a:prstGeom prst="rect">
-            <a:avLst/>
-          </a:prstGeom>
-          <a:noFill/>
-        </p:spPr>
-        <p:txBody>
-          <a:bodyPr wrap="none" lIns="0" rIns="0" tIns="0" bIns="0">
-            <a:noAutofit/>
-          </a:bodyPr>
-          <a:lstStyle/>
-          <a:p>
-            <a:r>
-              <a:rPr sz="1600" b="1">
-                <a:solidFill>
-                  <a:srgbClr val="C1C9C5"/>
-                </a:solidFill>
-                <a:latin typeface="Avenir Next"/>
-                <a:ea typeface="Hiragino Sans"/>
-                <a:cs typeface="Hiragino Sans"/>
-              </a:rPr>
-              <a:t>③ 基準の変換｜機器の銘板値（自己容量基準）を系統基準へ</a:t>
-            </a:r>
-          </a:p>
-        </p:txBody>
-      </p:sp>
-      <p:sp>
-        <p:nvSpPr>
-          <p:cNvPr id="10" name="build:ghost"/>
-          <p:cNvSpPr txBox="1"/>
-          <p:nvPr/>
-        </p:nvSpPr>
-        <p:spPr>
-          <a:xfrm>
-            <a:off x="822960" y="4536185"/>
-            <a:ext cx="10801807" cy="695325"/>
-          </a:xfrm>
-          <a:prstGeom prst="rect">
-            <a:avLst/>
-          </a:prstGeom>
-          <a:noFill/>
-        </p:spPr>
-        <p:txBody>
-          <a:bodyPr wrap="square" lIns="0" rIns="0" tIns="0" bIns="0">
-            <a:noAutofit/>
-          </a:bodyPr>
-          <a:lstStyle/>
-          <a:p>
-            <a:pPr>
-              <a:lnSpc>
-                <a:spcPct val="130000"/>
-              </a:lnSpc>
-            </a:pPr>
-            <a:r>
-              <a:rPr sz="1500" b="1">
-                <a:solidFill>
-                  <a:srgbClr val="C1BCBB"/>
-                </a:solidFill>
-                <a:latin typeface="Avenir Next"/>
-                <a:ea typeface="Hiragino Sans"/>
-                <a:cs typeface="Hiragino Sans"/>
-              </a:rPr>
-              <a:t>Z_new = Z_old (S_new/S_old)(V_old/V_new)²</a:t>
-            </a:r>
-            <a:r>
-              <a:rPr sz="1500">
-                <a:solidFill>
-                  <a:srgbClr val="C1BCBB"/>
-                </a:solidFill>
-                <a:latin typeface="Avenir Next"/>
-                <a:ea typeface="Hiragino Sans"/>
-                <a:cs typeface="Hiragino Sans"/>
-              </a:rPr>
-              <a:t>。60 MVA・%Z 12% の変圧器は 100 MVA 基準で 0.12 × 100/60 = 0.200 p.u.。</a:t>
-            </a:r>
-          </a:p>
-        </p:txBody>
-      </p:sp>
-      <p:sp>
-        <p:nvSpPr>
-          <p:cNvPr id="11" name="TextBox 10"/>
+            <a:r>
+              <a:rPr sz="1400">
+                <a:solidFill>
+                  <a:srgbClr val="71635B"/>
+                </a:solidFill>
+                <a:latin typeface="Avenir Next"/>
+                <a:ea typeface="Hiragino Sans"/>
+                <a:cs typeface="Hiragino Sans"/>
+              </a:rPr>
+              <a:t>= (V_base/√3) × √3 V_base/S_base = V_base²/S_base。√3 が約分で消える。66 kV・100 MVA なら 43.6 Ω、875 A。　出典｜コード/fig_ch03.py</a:t>
+            </a:r>
+          </a:p>
+        </p:txBody>
+      </p:sp>
+      <p:sp>
+        <p:nvSpPr>
+          <p:cNvPr id="5" name="TextBox 4"/>
           <p:cNvSpPr txBox="1"/>
           <p:nvPr/>
         </p:nvSpPr>
@@ -15878,59 +14658,14 @@
       <p:grpSpPr/>
       <p:sp>
         <p:nvSpPr>
-          <p:cNvPr id="2" name="TextBox 1"/>
+          <p:cNvPr id="2" name="edge:title"/>
           <p:cNvSpPr txBox="1"/>
           <p:nvPr/>
         </p:nvSpPr>
         <p:spPr>
           <a:xfrm>
-            <a:off x="566928" y="457200"/>
-            <a:ext cx="11057839" cy="658368"/>
-          </a:xfrm>
-          <a:prstGeom prst="rect">
-            <a:avLst/>
-          </a:prstGeom>
-          <a:noFill/>
-        </p:spPr>
-        <p:txBody>
-          <a:bodyPr wrap="square" lIns="0" rIns="0" tIns="0" bIns="0" anchor="ctr">
-            <a:noAutofit/>
-          </a:bodyPr>
-          <a:lstStyle/>
-          <a:p>
-            <a:pPr>
-              <a:lnSpc>
-                <a:spcPct val="106000"/>
-              </a:lnSpc>
-              <a:defRPr sz="3390" b="1">
-                <a:solidFill>
-                  <a:srgbClr val="7C332A"/>
-                </a:solidFill>
-                <a:latin typeface="Avenir Next"/>
-                <a:ea typeface="Hiragino Sans"/>
-                <a:cs typeface="Hiragino Sans"/>
-              </a:defRPr>
-            </a:pPr>
-            <a:r>
-              <a:rPr>
-                <a:ea typeface="Hiragino Sans"/>
-                <a:cs typeface="Hiragino Sans"/>
-              </a:rPr>
-              <a:t>導出 — Z_base と基準の変換</a:t>
-            </a:r>
-          </a:p>
-        </p:txBody>
-      </p:sp>
-      <p:sp>
-        <p:nvSpPr>
-          <p:cNvPr id="3" name="TextBox 2"/>
-          <p:cNvSpPr txBox="1"/>
-          <p:nvPr/>
-        </p:nvSpPr>
-        <p:spPr>
-          <a:xfrm>
-            <a:off x="566928" y="2229993"/>
-            <a:ext cx="11057839" cy="254000"/>
+            <a:off x="566928" y="146304"/>
+            <a:ext cx="11057839" cy="457200"/>
           </a:xfrm>
           <a:prstGeom prst="rect">
             <a:avLst/>
@@ -15943,30 +14678,60 @@
           </a:bodyPr>
           <a:lstStyle/>
           <a:p>
-            <a:r>
-              <a:rPr sz="1600" b="1">
-                <a:solidFill>
-                  <a:srgbClr val="5C7268"/>
-                </a:solidFill>
-                <a:latin typeface="Avenir Next"/>
-                <a:ea typeface="Hiragino Sans"/>
-                <a:cs typeface="Hiragino Sans"/>
-              </a:rPr>
-              <a:t>① 基準は 2 つだけ｜S_base（三相合計）と V_base（線間）を選ぶ</a:t>
-            </a:r>
-          </a:p>
-        </p:txBody>
-      </p:sp>
-      <p:sp>
-        <p:nvSpPr>
-          <p:cNvPr id="4" name="TextBox 3"/>
+            <a:pPr>
+              <a:defRPr sz="2400" b="1">
+                <a:solidFill>
+                  <a:srgbClr val="7C332A"/>
+                </a:solidFill>
+                <a:latin typeface="Avenir Next"/>
+                <a:ea typeface="Hiragino Sans"/>
+                <a:cs typeface="Hiragino Sans"/>
+              </a:defRPr>
+            </a:pPr>
+            <a:r>
+              <a:rPr>
+                <a:ea typeface="Hiragino Sans"/>
+                <a:cs typeface="Hiragino Sans"/>
+              </a:rPr>
+              <a:t>導出 — Z_base と基準の変換</a:t>
+            </a:r>
+          </a:p>
+        </p:txBody>
+      </p:sp>
+      <p:pic>
+        <p:nvPicPr>
+          <p:cNvPr id="3" name="Picture 2" descr="ch03_deriv_zbase_3.png"/>
+          <p:cNvPicPr>
+            <a:picLocks noChangeAspect="1"/>
+          </p:cNvPicPr>
+          <p:nvPr/>
+        </p:nvPicPr>
+        <p:blipFill>
+          <a:blip r:embed="rId2"/>
+          <a:stretch>
+            <a:fillRect/>
+          </a:stretch>
+        </p:blipFill>
+        <p:spPr>
+          <a:xfrm>
+            <a:off x="366173" y="713232"/>
+            <a:ext cx="11459349" cy="5322316"/>
+          </a:xfrm>
+          <a:prstGeom prst="rect">
+            <a:avLst/>
+          </a:prstGeom>
+        </p:spPr>
+      </p:pic>
+      <p:sp>
+        <p:nvSpPr>
+          <p:cNvPr id="4" name="edge:caption"/>
           <p:cNvSpPr txBox="1"/>
           <p:nvPr/>
         </p:nvSpPr>
         <p:spPr>
           <a:xfrm>
-            <a:off x="822960" y="2522093"/>
-            <a:ext cx="10801807" cy="385762"/>
+            <a:off x="228600" y="6090412"/>
+            <a:ext cx="11734495" cy="520700"/>
           </a:xfrm>
           <a:prstGeom prst="rect">
             <a:avLst/>
@@ -15979,325 +14744,24 @@
           </a:bodyPr>
           <a:lstStyle/>
           <a:p>
-            <a:pPr>
-              <a:lnSpc>
-                <a:spcPct val="130000"/>
-              </a:lnSpc>
-            </a:pPr>
-            <a:r>
-              <a:rPr sz="1500">
-                <a:solidFill>
-                  <a:srgbClr val="33221E"/>
-                </a:solidFill>
-                <a:latin typeface="Avenir Next"/>
-                <a:ea typeface="Hiragino Sans"/>
-                <a:cs typeface="Hiragino Sans"/>
-              </a:rPr>
-              <a:t>残りは自動で決まる。</a:t>
-            </a:r>
-            <a:r>
-              <a:rPr sz="1500" b="1">
-                <a:solidFill>
-                  <a:srgbClr val="33221E"/>
-                </a:solidFill>
-                <a:latin typeface="Avenir Next"/>
-                <a:ea typeface="Hiragino Sans"/>
-                <a:cs typeface="Hiragino Sans"/>
-              </a:rPr>
-              <a:t>I_base = S_base/(√3 V_base)</a:t>
-            </a:r>
-            <a:r>
-              <a:rPr sz="1500">
-                <a:solidFill>
-                  <a:srgbClr val="33221E"/>
-                </a:solidFill>
-                <a:latin typeface="Avenir Next"/>
-                <a:ea typeface="Hiragino Sans"/>
-                <a:cs typeface="Hiragino Sans"/>
-              </a:rPr>
-              <a:t>。三相基準と単相基準を混ぜないこと。</a:t>
-            </a:r>
-          </a:p>
-        </p:txBody>
-      </p:sp>
-      <p:sp>
-        <p:nvSpPr>
-          <p:cNvPr id="5" name="Rectangle 4"/>
-          <p:cNvSpPr/>
-          <p:nvPr/>
-        </p:nvSpPr>
-        <p:spPr>
-          <a:xfrm>
-            <a:off x="566928" y="3059747"/>
-            <a:ext cx="11057839" cy="9525"/>
-          </a:xfrm>
-          <a:prstGeom prst="rect">
-            <a:avLst/>
-          </a:prstGeom>
-          <a:solidFill>
-            <a:srgbClr val="E5DCCE"/>
-          </a:solidFill>
-          <a:ln>
-            <a:noFill/>
-          </a:ln>
-          <a:effectLst/>
-        </p:spPr>
-        <p:style>
-          <a:lnRef idx="1">
-            <a:schemeClr val="accent1"/>
-          </a:lnRef>
-          <a:fillRef idx="3">
-            <a:schemeClr val="accent1"/>
-          </a:fillRef>
-          <a:effectRef idx="2">
-            <a:schemeClr val="accent1"/>
-          </a:effectRef>
-          <a:fontRef idx="minor">
-            <a:schemeClr val="lt1"/>
-          </a:fontRef>
-        </p:style>
-        <p:txBody>
-          <a:bodyPr rtlCol="0" anchor="ctr"/>
-          <a:lstStyle/>
-          <a:p>
             <a:pPr algn="ctr"/>
-          </a:p>
-        </p:txBody>
-      </p:sp>
-      <p:sp>
-        <p:nvSpPr>
-          <p:cNvPr id="6" name="TextBox 5"/>
-          <p:cNvSpPr txBox="1"/>
-          <p:nvPr/>
-        </p:nvSpPr>
-        <p:spPr>
-          <a:xfrm>
-            <a:off x="566928" y="3237039"/>
-            <a:ext cx="11057839" cy="254000"/>
-          </a:xfrm>
-          <a:prstGeom prst="rect">
-            <a:avLst/>
-          </a:prstGeom>
-          <a:noFill/>
-        </p:spPr>
-        <p:txBody>
-          <a:bodyPr wrap="none" lIns="0" rIns="0" tIns="0" bIns="0">
-            <a:noAutofit/>
-          </a:bodyPr>
-          <a:lstStyle/>
-          <a:p>
-            <a:r>
-              <a:rPr sz="1600" b="1">
-                <a:solidFill>
-                  <a:srgbClr val="5C7268"/>
-                </a:solidFill>
-                <a:latin typeface="Avenir Next"/>
-                <a:ea typeface="Hiragino Sans"/>
-                <a:cs typeface="Hiragino Sans"/>
-              </a:rPr>
-              <a:t>② Z_base｜相電圧 ÷ 電流 = (V_base/√3)/I_base</a:t>
-            </a:r>
-          </a:p>
-        </p:txBody>
-      </p:sp>
-      <p:sp>
-        <p:nvSpPr>
-          <p:cNvPr id="7" name="TextBox 6"/>
-          <p:cNvSpPr txBox="1"/>
-          <p:nvPr/>
-        </p:nvSpPr>
-        <p:spPr>
-          <a:xfrm>
-            <a:off x="822960" y="3529139"/>
-            <a:ext cx="10801807" cy="385762"/>
-          </a:xfrm>
-          <a:prstGeom prst="rect">
-            <a:avLst/>
-          </a:prstGeom>
-          <a:noFill/>
-        </p:spPr>
-        <p:txBody>
-          <a:bodyPr wrap="square" lIns="0" rIns="0" tIns="0" bIns="0">
-            <a:noAutofit/>
-          </a:bodyPr>
-          <a:lstStyle/>
-          <a:p>
-            <a:pPr>
-              <a:lnSpc>
-                <a:spcPct val="130000"/>
-              </a:lnSpc>
-            </a:pPr>
-            <a:r>
-              <a:rPr sz="1500">
-                <a:solidFill>
-                  <a:srgbClr val="33221E"/>
-                </a:solidFill>
-                <a:latin typeface="Avenir Next"/>
-                <a:ea typeface="Hiragino Sans"/>
-                <a:cs typeface="Hiragino Sans"/>
-              </a:rPr>
-              <a:t>= (V_base/√3) × √3 V_base/S_base = </a:t>
-            </a:r>
-            <a:r>
-              <a:rPr sz="1500" b="1">
-                <a:solidFill>
-                  <a:srgbClr val="33221E"/>
-                </a:solidFill>
-                <a:latin typeface="Avenir Next"/>
-                <a:ea typeface="Hiragino Sans"/>
-                <a:cs typeface="Hiragino Sans"/>
-              </a:rPr>
-              <a:t>V_base²/S_base</a:t>
-            </a:r>
-            <a:r>
-              <a:rPr sz="1500">
-                <a:solidFill>
-                  <a:srgbClr val="33221E"/>
-                </a:solidFill>
-                <a:latin typeface="Avenir Next"/>
-                <a:ea typeface="Hiragino Sans"/>
-                <a:cs typeface="Hiragino Sans"/>
-              </a:rPr>
-              <a:t>。√3 が約分で消える。66 kV・100 MVA なら 43.6 Ω、875 A。</a:t>
-            </a:r>
-          </a:p>
-        </p:txBody>
-      </p:sp>
-      <p:sp>
-        <p:nvSpPr>
-          <p:cNvPr id="8" name="Rectangle 7"/>
-          <p:cNvSpPr/>
-          <p:nvPr/>
-        </p:nvSpPr>
-        <p:spPr>
-          <a:xfrm>
-            <a:off x="566928" y="4066793"/>
-            <a:ext cx="11057839" cy="9525"/>
-          </a:xfrm>
-          <a:prstGeom prst="rect">
-            <a:avLst/>
-          </a:prstGeom>
-          <a:solidFill>
-            <a:srgbClr val="E5DCCE"/>
-          </a:solidFill>
-          <a:ln>
-            <a:noFill/>
-          </a:ln>
-          <a:effectLst/>
-        </p:spPr>
-        <p:style>
-          <a:lnRef idx="1">
-            <a:schemeClr val="accent1"/>
-          </a:lnRef>
-          <a:fillRef idx="3">
-            <a:schemeClr val="accent1"/>
-          </a:fillRef>
-          <a:effectRef idx="2">
-            <a:schemeClr val="accent1"/>
-          </a:effectRef>
-          <a:fontRef idx="minor">
-            <a:schemeClr val="lt1"/>
-          </a:fontRef>
-        </p:style>
-        <p:txBody>
-          <a:bodyPr rtlCol="0" anchor="ctr"/>
-          <a:lstStyle/>
-          <a:p>
-            <a:pPr algn="ctr"/>
-          </a:p>
-        </p:txBody>
-      </p:sp>
-      <p:sp>
-        <p:nvSpPr>
-          <p:cNvPr id="9" name="TextBox 8"/>
-          <p:cNvSpPr txBox="1"/>
-          <p:nvPr/>
-        </p:nvSpPr>
-        <p:spPr>
-          <a:xfrm>
-            <a:off x="566928" y="4244085"/>
-            <a:ext cx="11057839" cy="254000"/>
-          </a:xfrm>
-          <a:prstGeom prst="rect">
-            <a:avLst/>
-          </a:prstGeom>
-          <a:noFill/>
-        </p:spPr>
-        <p:txBody>
-          <a:bodyPr wrap="none" lIns="0" rIns="0" tIns="0" bIns="0">
-            <a:noAutofit/>
-          </a:bodyPr>
-          <a:lstStyle/>
-          <a:p>
-            <a:r>
-              <a:rPr sz="1600" b="1">
-                <a:solidFill>
-                  <a:srgbClr val="5C7268"/>
-                </a:solidFill>
-                <a:latin typeface="Avenir Next"/>
-                <a:ea typeface="Hiragino Sans"/>
-                <a:cs typeface="Hiragino Sans"/>
-              </a:rPr>
-              <a:t>③ 基準の変換｜機器の銘板値（自己容量基準）を系統基準へ</a:t>
-            </a:r>
-          </a:p>
-        </p:txBody>
-      </p:sp>
-      <p:sp>
-        <p:nvSpPr>
-          <p:cNvPr id="10" name="TextBox 9"/>
-          <p:cNvSpPr txBox="1"/>
-          <p:nvPr/>
-        </p:nvSpPr>
-        <p:spPr>
-          <a:xfrm>
-            <a:off x="822960" y="4536185"/>
-            <a:ext cx="10801807" cy="695325"/>
-          </a:xfrm>
-          <a:prstGeom prst="rect">
-            <a:avLst/>
-          </a:prstGeom>
-          <a:noFill/>
-        </p:spPr>
-        <p:txBody>
-          <a:bodyPr wrap="square" lIns="0" rIns="0" tIns="0" bIns="0">
-            <a:noAutofit/>
-          </a:bodyPr>
-          <a:lstStyle/>
-          <a:p>
-            <a:pPr>
-              <a:lnSpc>
-                <a:spcPct val="130000"/>
-              </a:lnSpc>
-            </a:pPr>
-            <a:r>
-              <a:rPr sz="1500" b="1">
-                <a:solidFill>
-                  <a:srgbClr val="33221E"/>
-                </a:solidFill>
-                <a:latin typeface="Avenir Next"/>
-                <a:ea typeface="Hiragino Sans"/>
-                <a:cs typeface="Hiragino Sans"/>
-              </a:rPr>
-              <a:t>Z_new = Z_old (S_new/S_old)(V_old/V_new)²</a:t>
-            </a:r>
-            <a:r>
-              <a:rPr sz="1500">
-                <a:solidFill>
-                  <a:srgbClr val="33221E"/>
-                </a:solidFill>
-                <a:latin typeface="Avenir Next"/>
-                <a:ea typeface="Hiragino Sans"/>
-                <a:cs typeface="Hiragino Sans"/>
-              </a:rPr>
-              <a:t>。60 MVA・%Z 12% の変圧器は 100 MVA 基準で 0.12 × 100/60 = 0.200 p.u.。</a:t>
-            </a:r>
-          </a:p>
-        </p:txBody>
-      </p:sp>
-      <p:sp>
-        <p:nvSpPr>
-          <p:cNvPr id="11" name="TextBox 10"/>
+            <a:r>
+              <a:rPr sz="1400">
+                <a:solidFill>
+                  <a:srgbClr val="71635B"/>
+                </a:solidFill>
+                <a:latin typeface="Avenir Next"/>
+                <a:ea typeface="Hiragino Sans"/>
+                <a:cs typeface="Hiragino Sans"/>
+              </a:rPr>
+              <a:t>Z_new = Z_old (S_new/S_old)(V_old/V_new)²。60 MVA・%Z 12% の変圧器は 100 MVA 基準で 0.12 × 100/60 = 0.200 p.u.。　出典｜コード/fig_ch03.py</a:t>
+            </a:r>
+          </a:p>
+        </p:txBody>
+      </p:sp>
+      <p:sp>
+        <p:nvSpPr>
+          <p:cNvPr id="5" name="TextBox 4"/>
           <p:cNvSpPr txBox="1"/>
           <p:nvPr/>
         </p:nvSpPr>
@@ -19218,59 +17682,14 @@
       <p:grpSpPr/>
       <p:sp>
         <p:nvSpPr>
-          <p:cNvPr id="2" name="TextBox 1"/>
+          <p:cNvPr id="2" name="edge:title"/>
           <p:cNvSpPr txBox="1"/>
           <p:nvPr/>
         </p:nvSpPr>
         <p:spPr>
           <a:xfrm>
-            <a:off x="566928" y="457200"/>
-            <a:ext cx="11057839" cy="658368"/>
-          </a:xfrm>
-          <a:prstGeom prst="rect">
-            <a:avLst/>
-          </a:prstGeom>
-          <a:noFill/>
-        </p:spPr>
-        <p:txBody>
-          <a:bodyPr wrap="square" lIns="0" rIns="0" tIns="0" bIns="0" anchor="ctr">
-            <a:noAutofit/>
-          </a:bodyPr>
-          <a:lstStyle/>
-          <a:p>
-            <a:pPr>
-              <a:lnSpc>
-                <a:spcPct val="106000"/>
-              </a:lnSpc>
-              <a:defRPr sz="3390" b="1">
-                <a:solidFill>
-                  <a:srgbClr val="7C332A"/>
-                </a:solidFill>
-                <a:latin typeface="Avenir Next"/>
-                <a:ea typeface="Hiragino Sans"/>
-                <a:cs typeface="Hiragino Sans"/>
-              </a:defRPr>
-            </a:pPr>
-            <a:r>
-              <a:rPr>
-                <a:ea typeface="Hiragino Sans"/>
-                <a:cs typeface="Hiragino Sans"/>
-              </a:rPr>
-              <a:t>導出 — 送電電力式 P と Q_r</a:t>
-            </a:r>
-          </a:p>
-        </p:txBody>
-      </p:sp>
-      <p:sp>
-        <p:nvSpPr>
-          <p:cNvPr id="3" name="TextBox 2"/>
-          <p:cNvSpPr txBox="1"/>
-          <p:nvPr/>
-        </p:nvSpPr>
-        <p:spPr>
-          <a:xfrm>
-            <a:off x="566928" y="2384775"/>
-            <a:ext cx="11057839" cy="254000"/>
+            <a:off x="566928" y="146304"/>
+            <a:ext cx="11057839" cy="457200"/>
           </a:xfrm>
           <a:prstGeom prst="rect">
             <a:avLst/>
@@ -19283,30 +17702,60 @@
           </a:bodyPr>
           <a:lstStyle/>
           <a:p>
-            <a:r>
-              <a:rPr sz="1600" b="1">
-                <a:solidFill>
-                  <a:srgbClr val="5C7268"/>
-                </a:solidFill>
-                <a:latin typeface="Avenir Next"/>
-                <a:ea typeface="Hiragino Sans"/>
-                <a:cs typeface="Hiragino Sans"/>
-              </a:rPr>
-              <a:t>① 電流｜İ = (V_s∠δ − V_r)/(jX)（R ≒ 0 の架空線）</a:t>
-            </a:r>
-          </a:p>
-        </p:txBody>
-      </p:sp>
-      <p:sp>
-        <p:nvSpPr>
-          <p:cNvPr id="4" name="TextBox 3"/>
+            <a:pPr>
+              <a:defRPr sz="2400" b="1">
+                <a:solidFill>
+                  <a:srgbClr val="7C332A"/>
+                </a:solidFill>
+                <a:latin typeface="Avenir Next"/>
+                <a:ea typeface="Hiragino Sans"/>
+                <a:cs typeface="Hiragino Sans"/>
+              </a:defRPr>
+            </a:pPr>
+            <a:r>
+              <a:rPr>
+                <a:ea typeface="Hiragino Sans"/>
+                <a:cs typeface="Hiragino Sans"/>
+              </a:rPr>
+              <a:t>導出 — 送電電力式 P と Q_r</a:t>
+            </a:r>
+          </a:p>
+        </p:txBody>
+      </p:sp>
+      <p:pic>
+        <p:nvPicPr>
+          <p:cNvPr id="3" name="Picture 2" descr="ch03_deriv_ptrans_1.png"/>
+          <p:cNvPicPr>
+            <a:picLocks noChangeAspect="1"/>
+          </p:cNvPicPr>
+          <p:nvPr/>
+        </p:nvPicPr>
+        <p:blipFill>
+          <a:blip r:embed="rId2"/>
+          <a:stretch>
+            <a:fillRect/>
+          </a:stretch>
+        </p:blipFill>
+        <p:spPr>
+          <a:xfrm>
+            <a:off x="762110" y="713232"/>
+            <a:ext cx="10667474" cy="5322316"/>
+          </a:xfrm>
+          <a:prstGeom prst="rect">
+            <a:avLst/>
+          </a:prstGeom>
+        </p:spPr>
+      </p:pic>
+      <p:sp>
+        <p:nvSpPr>
+          <p:cNvPr id="4" name="edge:caption"/>
           <p:cNvSpPr txBox="1"/>
           <p:nvPr/>
         </p:nvSpPr>
         <p:spPr>
           <a:xfrm>
-            <a:off x="822960" y="2676875"/>
-            <a:ext cx="10801807" cy="385762"/>
+            <a:off x="228600" y="6090412"/>
+            <a:ext cx="11734495" cy="520700"/>
           </a:xfrm>
           <a:prstGeom prst="rect">
             <a:avLst/>
@@ -19319,314 +17768,24 @@
           </a:bodyPr>
           <a:lstStyle/>
           <a:p>
-            <a:pPr>
-              <a:lnSpc>
-                <a:spcPct val="130000"/>
-              </a:lnSpc>
-            </a:pPr>
-            <a:r>
-              <a:rPr sz="1500">
-                <a:solidFill>
-                  <a:srgbClr val="33221E"/>
-                </a:solidFill>
-                <a:latin typeface="Avenir Next"/>
-                <a:ea typeface="Hiragino Sans"/>
-                <a:cs typeface="Hiragino Sans"/>
-              </a:rPr>
-              <a:t>送電端 V̇_s = V_s∠δ、受電端 V̇_r = V_r∠0。電圧の差をリアクタンスで割る。δ は 2 母線の位相のずれ（相差角）。</a:t>
-            </a:r>
-          </a:p>
-        </p:txBody>
-      </p:sp>
-      <p:sp>
-        <p:nvSpPr>
-          <p:cNvPr id="5" name="Rectangle 4"/>
-          <p:cNvSpPr/>
-          <p:nvPr/>
-        </p:nvSpPr>
-        <p:spPr>
-          <a:xfrm>
-            <a:off x="566928" y="3214529"/>
-            <a:ext cx="11057839" cy="9525"/>
-          </a:xfrm>
-          <a:prstGeom prst="rect">
-            <a:avLst/>
-          </a:prstGeom>
-          <a:solidFill>
-            <a:srgbClr val="E5DCCE"/>
-          </a:solidFill>
-          <a:ln>
-            <a:noFill/>
-          </a:ln>
-          <a:effectLst/>
-        </p:spPr>
-        <p:style>
-          <a:lnRef idx="1">
-            <a:schemeClr val="accent1"/>
-          </a:lnRef>
-          <a:fillRef idx="3">
-            <a:schemeClr val="accent1"/>
-          </a:fillRef>
-          <a:effectRef idx="2">
-            <a:schemeClr val="accent1"/>
-          </a:effectRef>
-          <a:fontRef idx="minor">
-            <a:schemeClr val="lt1"/>
-          </a:fontRef>
-        </p:style>
-        <p:txBody>
-          <a:bodyPr rtlCol="0" anchor="ctr"/>
-          <a:lstStyle/>
-          <a:p>
             <a:pPr algn="ctr"/>
-          </a:p>
-        </p:txBody>
-      </p:sp>
-      <p:sp>
-        <p:nvSpPr>
-          <p:cNvPr id="6" name="build:ghost"/>
-          <p:cNvSpPr txBox="1"/>
-          <p:nvPr/>
-        </p:nvSpPr>
-        <p:spPr>
-          <a:xfrm>
-            <a:off x="566928" y="3391821"/>
-            <a:ext cx="11057839" cy="254000"/>
-          </a:xfrm>
-          <a:prstGeom prst="rect">
-            <a:avLst/>
-          </a:prstGeom>
-          <a:noFill/>
-        </p:spPr>
-        <p:txBody>
-          <a:bodyPr wrap="none" lIns="0" rIns="0" tIns="0" bIns="0">
-            <a:noAutofit/>
-          </a:bodyPr>
-          <a:lstStyle/>
-          <a:p>
-            <a:r>
-              <a:rPr sz="1600" b="1">
-                <a:solidFill>
-                  <a:srgbClr val="C1C9C5"/>
-                </a:solidFill>
-                <a:latin typeface="Avenir Next"/>
-                <a:ea typeface="Hiragino Sans"/>
-                <a:cs typeface="Hiragino Sans"/>
-              </a:rPr>
-              <a:t>② 受電端の複素電力｜S_r = V̇_r İ* = V_r (V_s∠−δ − V_r)/(−jX)</a:t>
-            </a:r>
-          </a:p>
-        </p:txBody>
-      </p:sp>
-      <p:sp>
-        <p:nvSpPr>
-          <p:cNvPr id="7" name="build:ghost"/>
-          <p:cNvSpPr txBox="1"/>
-          <p:nvPr/>
-        </p:nvSpPr>
-        <p:spPr>
-          <a:xfrm>
-            <a:off x="822960" y="3683921"/>
-            <a:ext cx="10801807" cy="385762"/>
-          </a:xfrm>
-          <a:prstGeom prst="rect">
-            <a:avLst/>
-          </a:prstGeom>
-          <a:noFill/>
-        </p:spPr>
-        <p:txBody>
-          <a:bodyPr wrap="square" lIns="0" rIns="0" tIns="0" bIns="0">
-            <a:noAutofit/>
-          </a:bodyPr>
-          <a:lstStyle/>
-          <a:p>
-            <a:pPr>
-              <a:lnSpc>
-                <a:spcPct val="130000"/>
-              </a:lnSpc>
-            </a:pPr>
-            <a:r>
-              <a:rPr sz="1500">
-                <a:solidFill>
-                  <a:srgbClr val="C1BCBB"/>
-                </a:solidFill>
-                <a:latin typeface="Avenir Next"/>
-                <a:ea typeface="Hiragino Sans"/>
-                <a:cs typeface="Hiragino Sans"/>
-              </a:rPr>
-              <a:t>1/(−j) = j とオイラーの公式 e^{−jδ} = cos δ − j sin δ で </a:t>
-            </a:r>
-            <a:r>
-              <a:rPr sz="1500" b="1">
-                <a:solidFill>
-                  <a:srgbClr val="C1BCBB"/>
-                </a:solidFill>
-                <a:latin typeface="Avenir Next"/>
-                <a:ea typeface="Hiragino Sans"/>
-                <a:cs typeface="Hiragino Sans"/>
-              </a:rPr>
-              <a:t>S_r = j V_r (V_s cos δ − j V_s sin δ − V_r)/X</a:t>
-            </a:r>
-            <a:r>
-              <a:rPr sz="1500">
-                <a:solidFill>
-                  <a:srgbClr val="C1BCBB"/>
-                </a:solidFill>
-                <a:latin typeface="Avenir Next"/>
-                <a:ea typeface="Hiragino Sans"/>
-                <a:cs typeface="Hiragino Sans"/>
-              </a:rPr>
-              <a:t>。</a:t>
-            </a:r>
-          </a:p>
-        </p:txBody>
-      </p:sp>
-      <p:sp>
-        <p:nvSpPr>
-          <p:cNvPr id="8" name="Rectangle 7"/>
-          <p:cNvSpPr/>
-          <p:nvPr/>
-        </p:nvSpPr>
-        <p:spPr>
-          <a:xfrm>
-            <a:off x="566928" y="4221575"/>
-            <a:ext cx="11057839" cy="9525"/>
-          </a:xfrm>
-          <a:prstGeom prst="rect">
-            <a:avLst/>
-          </a:prstGeom>
-          <a:solidFill>
-            <a:srgbClr val="E5DCCE"/>
-          </a:solidFill>
-          <a:ln>
-            <a:noFill/>
-          </a:ln>
-          <a:effectLst/>
-        </p:spPr>
-        <p:style>
-          <a:lnRef idx="1">
-            <a:schemeClr val="accent1"/>
-          </a:lnRef>
-          <a:fillRef idx="3">
-            <a:schemeClr val="accent1"/>
-          </a:fillRef>
-          <a:effectRef idx="2">
-            <a:schemeClr val="accent1"/>
-          </a:effectRef>
-          <a:fontRef idx="minor">
-            <a:schemeClr val="lt1"/>
-          </a:fontRef>
-        </p:style>
-        <p:txBody>
-          <a:bodyPr rtlCol="0" anchor="ctr"/>
-          <a:lstStyle/>
-          <a:p>
-            <a:pPr algn="ctr"/>
-          </a:p>
-        </p:txBody>
-      </p:sp>
-      <p:sp>
-        <p:nvSpPr>
-          <p:cNvPr id="9" name="build:ghost"/>
-          <p:cNvSpPr txBox="1"/>
-          <p:nvPr/>
-        </p:nvSpPr>
-        <p:spPr>
-          <a:xfrm>
-            <a:off x="566928" y="4398867"/>
-            <a:ext cx="11057839" cy="254000"/>
-          </a:xfrm>
-          <a:prstGeom prst="rect">
-            <a:avLst/>
-          </a:prstGeom>
-          <a:noFill/>
-        </p:spPr>
-        <p:txBody>
-          <a:bodyPr wrap="none" lIns="0" rIns="0" tIns="0" bIns="0">
-            <a:noAutofit/>
-          </a:bodyPr>
-          <a:lstStyle/>
-          <a:p>
-            <a:r>
-              <a:rPr sz="1600" b="1">
-                <a:solidFill>
-                  <a:srgbClr val="C1C9C5"/>
-                </a:solidFill>
-                <a:latin typeface="Avenir Next"/>
-                <a:ea typeface="Hiragino Sans"/>
-                <a:cs typeface="Hiragino Sans"/>
-              </a:rPr>
-              <a:t>③ 実部と虚部｜P = V_sV_r sin δ/X、Q_r = (V_sV_r cos δ − V_r²)/X</a:t>
-            </a:r>
-          </a:p>
-        </p:txBody>
-      </p:sp>
-      <p:sp>
-        <p:nvSpPr>
-          <p:cNvPr id="10" name="build:ghost"/>
-          <p:cNvSpPr txBox="1"/>
-          <p:nvPr/>
-        </p:nvSpPr>
-        <p:spPr>
-          <a:xfrm>
-            <a:off x="822960" y="4690967"/>
-            <a:ext cx="10801807" cy="385762"/>
-          </a:xfrm>
-          <a:prstGeom prst="rect">
-            <a:avLst/>
-          </a:prstGeom>
-          <a:noFill/>
-        </p:spPr>
-        <p:txBody>
-          <a:bodyPr wrap="square" lIns="0" rIns="0" tIns="0" bIns="0">
-            <a:noAutofit/>
-          </a:bodyPr>
-          <a:lstStyle/>
-          <a:p>
-            <a:pPr>
-              <a:lnSpc>
-                <a:spcPct val="130000"/>
-              </a:lnSpc>
-            </a:pPr>
-            <a:r>
-              <a:rPr sz="1500">
-                <a:solidFill>
-                  <a:srgbClr val="C1BCBB"/>
-                </a:solidFill>
-                <a:latin typeface="Avenir Next"/>
-                <a:ea typeface="Hiragino Sans"/>
-                <a:cs typeface="Hiragino Sans"/>
-              </a:rPr>
-              <a:t>δ が小さいと sin δ ≒ δ、cos δ ≒ 1 なので </a:t>
-            </a:r>
-            <a:r>
-              <a:rPr sz="1500" b="1">
-                <a:solidFill>
-                  <a:srgbClr val="C1BCBB"/>
-                </a:solidFill>
-                <a:latin typeface="Avenir Next"/>
-                <a:ea typeface="Hiragino Sans"/>
-                <a:cs typeface="Hiragino Sans"/>
-              </a:rPr>
-              <a:t>P ≒ V_sV_r δ/X、Q_r ≒ V_r (V_s − V_r)/X</a:t>
-            </a:r>
-            <a:r>
-              <a:rPr sz="1500">
-                <a:solidFill>
-                  <a:srgbClr val="C1BCBB"/>
-                </a:solidFill>
-                <a:latin typeface="Avenir Next"/>
-                <a:ea typeface="Hiragino Sans"/>
-                <a:cs typeface="Hiragino Sans"/>
-              </a:rPr>
-              <a:t>。P は δ、Q は電圧差で決まる。</a:t>
-            </a:r>
-          </a:p>
-        </p:txBody>
-      </p:sp>
-      <p:sp>
-        <p:nvSpPr>
-          <p:cNvPr id="11" name="TextBox 10"/>
+            <a:r>
+              <a:rPr sz="1400">
+                <a:solidFill>
+                  <a:srgbClr val="71635B"/>
+                </a:solidFill>
+                <a:latin typeface="Avenir Next"/>
+                <a:ea typeface="Hiragino Sans"/>
+                <a:cs typeface="Hiragino Sans"/>
+              </a:rPr>
+              <a:t>送電端 V̇_s = V_s∠δ、受電端 V̇_r = V_r∠0。電圧の差をリアクタンスで割る。δ は 2 母線の位相のずれ（相差角）。　出典｜コード/fig_ch03.py</a:t>
+            </a:r>
+          </a:p>
+        </p:txBody>
+      </p:sp>
+      <p:sp>
+        <p:nvSpPr>
+          <p:cNvPr id="5" name="TextBox 4"/>
           <p:cNvSpPr txBox="1"/>
           <p:nvPr/>
         </p:nvSpPr>
@@ -19682,59 +17841,14 @@
       <p:grpSpPr/>
       <p:sp>
         <p:nvSpPr>
-          <p:cNvPr id="2" name="TextBox 1"/>
+          <p:cNvPr id="2" name="edge:title"/>
           <p:cNvSpPr txBox="1"/>
           <p:nvPr/>
         </p:nvSpPr>
         <p:spPr>
           <a:xfrm>
-            <a:off x="566928" y="457200"/>
-            <a:ext cx="11057839" cy="658368"/>
-          </a:xfrm>
-          <a:prstGeom prst="rect">
-            <a:avLst/>
-          </a:prstGeom>
-          <a:noFill/>
-        </p:spPr>
-        <p:txBody>
-          <a:bodyPr wrap="square" lIns="0" rIns="0" tIns="0" bIns="0" anchor="ctr">
-            <a:noAutofit/>
-          </a:bodyPr>
-          <a:lstStyle/>
-          <a:p>
-            <a:pPr>
-              <a:lnSpc>
-                <a:spcPct val="106000"/>
-              </a:lnSpc>
-              <a:defRPr sz="3390" b="1">
-                <a:solidFill>
-                  <a:srgbClr val="7C332A"/>
-                </a:solidFill>
-                <a:latin typeface="Avenir Next"/>
-                <a:ea typeface="Hiragino Sans"/>
-                <a:cs typeface="Hiragino Sans"/>
-              </a:defRPr>
-            </a:pPr>
-            <a:r>
-              <a:rPr>
-                <a:ea typeface="Hiragino Sans"/>
-                <a:cs typeface="Hiragino Sans"/>
-              </a:rPr>
-              <a:t>導出 — 送電電力式 P と Q_r</a:t>
-            </a:r>
-          </a:p>
-        </p:txBody>
-      </p:sp>
-      <p:sp>
-        <p:nvSpPr>
-          <p:cNvPr id="3" name="TextBox 2"/>
-          <p:cNvSpPr txBox="1"/>
-          <p:nvPr/>
-        </p:nvSpPr>
-        <p:spPr>
-          <a:xfrm>
-            <a:off x="566928" y="2384775"/>
-            <a:ext cx="11057839" cy="254000"/>
+            <a:off x="566928" y="146304"/>
+            <a:ext cx="11057839" cy="457200"/>
           </a:xfrm>
           <a:prstGeom prst="rect">
             <a:avLst/>
@@ -19747,30 +17861,60 @@
           </a:bodyPr>
           <a:lstStyle/>
           <a:p>
-            <a:r>
-              <a:rPr sz="1600" b="1">
-                <a:solidFill>
-                  <a:srgbClr val="5C7268"/>
-                </a:solidFill>
-                <a:latin typeface="Avenir Next"/>
-                <a:ea typeface="Hiragino Sans"/>
-                <a:cs typeface="Hiragino Sans"/>
-              </a:rPr>
-              <a:t>① 電流｜İ = (V_s∠δ − V_r)/(jX)（R ≒ 0 の架空線）</a:t>
-            </a:r>
-          </a:p>
-        </p:txBody>
-      </p:sp>
-      <p:sp>
-        <p:nvSpPr>
-          <p:cNvPr id="4" name="TextBox 3"/>
+            <a:pPr>
+              <a:defRPr sz="2400" b="1">
+                <a:solidFill>
+                  <a:srgbClr val="7C332A"/>
+                </a:solidFill>
+                <a:latin typeface="Avenir Next"/>
+                <a:ea typeface="Hiragino Sans"/>
+                <a:cs typeface="Hiragino Sans"/>
+              </a:defRPr>
+            </a:pPr>
+            <a:r>
+              <a:rPr>
+                <a:ea typeface="Hiragino Sans"/>
+                <a:cs typeface="Hiragino Sans"/>
+              </a:rPr>
+              <a:t>導出 — 送電電力式 P と Q_r</a:t>
+            </a:r>
+          </a:p>
+        </p:txBody>
+      </p:sp>
+      <p:pic>
+        <p:nvPicPr>
+          <p:cNvPr id="3" name="Picture 2" descr="ch03_deriv_ptrans_2.png"/>
+          <p:cNvPicPr>
+            <a:picLocks noChangeAspect="1"/>
+          </p:cNvPicPr>
+          <p:nvPr/>
+        </p:nvPicPr>
+        <p:blipFill>
+          <a:blip r:embed="rId2"/>
+          <a:stretch>
+            <a:fillRect/>
+          </a:stretch>
+        </p:blipFill>
+        <p:spPr>
+          <a:xfrm>
+            <a:off x="551856" y="713232"/>
+            <a:ext cx="11087983" cy="5532120"/>
+          </a:xfrm>
+          <a:prstGeom prst="rect">
+            <a:avLst/>
+          </a:prstGeom>
+        </p:spPr>
+      </p:pic>
+      <p:sp>
+        <p:nvSpPr>
+          <p:cNvPr id="4" name="edge:caption"/>
           <p:cNvSpPr txBox="1"/>
           <p:nvPr/>
         </p:nvSpPr>
         <p:spPr>
           <a:xfrm>
-            <a:off x="822960" y="2676875"/>
-            <a:ext cx="10801807" cy="385762"/>
+            <a:off x="228600" y="6300216"/>
+            <a:ext cx="11734495" cy="310896"/>
           </a:xfrm>
           <a:prstGeom prst="rect">
             <a:avLst/>
@@ -19783,314 +17927,24 @@
           </a:bodyPr>
           <a:lstStyle/>
           <a:p>
-            <a:pPr>
-              <a:lnSpc>
-                <a:spcPct val="130000"/>
-              </a:lnSpc>
-            </a:pPr>
-            <a:r>
-              <a:rPr sz="1500">
-                <a:solidFill>
-                  <a:srgbClr val="33221E"/>
-                </a:solidFill>
-                <a:latin typeface="Avenir Next"/>
-                <a:ea typeface="Hiragino Sans"/>
-                <a:cs typeface="Hiragino Sans"/>
-              </a:rPr>
-              <a:t>送電端 V̇_s = V_s∠δ、受電端 V̇_r = V_r∠0。電圧の差をリアクタンスで割る。δ は 2 母線の位相のずれ（相差角）。</a:t>
-            </a:r>
-          </a:p>
-        </p:txBody>
-      </p:sp>
-      <p:sp>
-        <p:nvSpPr>
-          <p:cNvPr id="5" name="Rectangle 4"/>
-          <p:cNvSpPr/>
-          <p:nvPr/>
-        </p:nvSpPr>
-        <p:spPr>
-          <a:xfrm>
-            <a:off x="566928" y="3214529"/>
-            <a:ext cx="11057839" cy="9525"/>
-          </a:xfrm>
-          <a:prstGeom prst="rect">
-            <a:avLst/>
-          </a:prstGeom>
-          <a:solidFill>
-            <a:srgbClr val="E5DCCE"/>
-          </a:solidFill>
-          <a:ln>
-            <a:noFill/>
-          </a:ln>
-          <a:effectLst/>
-        </p:spPr>
-        <p:style>
-          <a:lnRef idx="1">
-            <a:schemeClr val="accent1"/>
-          </a:lnRef>
-          <a:fillRef idx="3">
-            <a:schemeClr val="accent1"/>
-          </a:fillRef>
-          <a:effectRef idx="2">
-            <a:schemeClr val="accent1"/>
-          </a:effectRef>
-          <a:fontRef idx="minor">
-            <a:schemeClr val="lt1"/>
-          </a:fontRef>
-        </p:style>
-        <p:txBody>
-          <a:bodyPr rtlCol="0" anchor="ctr"/>
-          <a:lstStyle/>
-          <a:p>
             <a:pPr algn="ctr"/>
-          </a:p>
-        </p:txBody>
-      </p:sp>
-      <p:sp>
-        <p:nvSpPr>
-          <p:cNvPr id="6" name="TextBox 5"/>
-          <p:cNvSpPr txBox="1"/>
-          <p:nvPr/>
-        </p:nvSpPr>
-        <p:spPr>
-          <a:xfrm>
-            <a:off x="566928" y="3391821"/>
-            <a:ext cx="11057839" cy="254000"/>
-          </a:xfrm>
-          <a:prstGeom prst="rect">
-            <a:avLst/>
-          </a:prstGeom>
-          <a:noFill/>
-        </p:spPr>
-        <p:txBody>
-          <a:bodyPr wrap="none" lIns="0" rIns="0" tIns="0" bIns="0">
-            <a:noAutofit/>
-          </a:bodyPr>
-          <a:lstStyle/>
-          <a:p>
-            <a:r>
-              <a:rPr sz="1600" b="1">
-                <a:solidFill>
-                  <a:srgbClr val="5C7268"/>
-                </a:solidFill>
-                <a:latin typeface="Avenir Next"/>
-                <a:ea typeface="Hiragino Sans"/>
-                <a:cs typeface="Hiragino Sans"/>
-              </a:rPr>
-              <a:t>② 受電端の複素電力｜S_r = V̇_r İ* = V_r (V_s∠−δ − V_r)/(−jX)</a:t>
-            </a:r>
-          </a:p>
-        </p:txBody>
-      </p:sp>
-      <p:sp>
-        <p:nvSpPr>
-          <p:cNvPr id="7" name="TextBox 6"/>
-          <p:cNvSpPr txBox="1"/>
-          <p:nvPr/>
-        </p:nvSpPr>
-        <p:spPr>
-          <a:xfrm>
-            <a:off x="822960" y="3683921"/>
-            <a:ext cx="10801807" cy="385762"/>
-          </a:xfrm>
-          <a:prstGeom prst="rect">
-            <a:avLst/>
-          </a:prstGeom>
-          <a:noFill/>
-        </p:spPr>
-        <p:txBody>
-          <a:bodyPr wrap="square" lIns="0" rIns="0" tIns="0" bIns="0">
-            <a:noAutofit/>
-          </a:bodyPr>
-          <a:lstStyle/>
-          <a:p>
-            <a:pPr>
-              <a:lnSpc>
-                <a:spcPct val="130000"/>
-              </a:lnSpc>
-            </a:pPr>
-            <a:r>
-              <a:rPr sz="1500">
-                <a:solidFill>
-                  <a:srgbClr val="33221E"/>
-                </a:solidFill>
-                <a:latin typeface="Avenir Next"/>
-                <a:ea typeface="Hiragino Sans"/>
-                <a:cs typeface="Hiragino Sans"/>
-              </a:rPr>
-              <a:t>1/(−j) = j とオイラーの公式 e^{−jδ} = cos δ − j sin δ で </a:t>
-            </a:r>
-            <a:r>
-              <a:rPr sz="1500" b="1">
-                <a:solidFill>
-                  <a:srgbClr val="33221E"/>
-                </a:solidFill>
-                <a:latin typeface="Avenir Next"/>
-                <a:ea typeface="Hiragino Sans"/>
-                <a:cs typeface="Hiragino Sans"/>
-              </a:rPr>
-              <a:t>S_r = j V_r (V_s cos δ − j V_s sin δ − V_r)/X</a:t>
-            </a:r>
-            <a:r>
-              <a:rPr sz="1500">
-                <a:solidFill>
-                  <a:srgbClr val="33221E"/>
-                </a:solidFill>
-                <a:latin typeface="Avenir Next"/>
-                <a:ea typeface="Hiragino Sans"/>
-                <a:cs typeface="Hiragino Sans"/>
-              </a:rPr>
-              <a:t>。</a:t>
-            </a:r>
-          </a:p>
-        </p:txBody>
-      </p:sp>
-      <p:sp>
-        <p:nvSpPr>
-          <p:cNvPr id="8" name="Rectangle 7"/>
-          <p:cNvSpPr/>
-          <p:nvPr/>
-        </p:nvSpPr>
-        <p:spPr>
-          <a:xfrm>
-            <a:off x="566928" y="4221575"/>
-            <a:ext cx="11057839" cy="9525"/>
-          </a:xfrm>
-          <a:prstGeom prst="rect">
-            <a:avLst/>
-          </a:prstGeom>
-          <a:solidFill>
-            <a:srgbClr val="E5DCCE"/>
-          </a:solidFill>
-          <a:ln>
-            <a:noFill/>
-          </a:ln>
-          <a:effectLst/>
-        </p:spPr>
-        <p:style>
-          <a:lnRef idx="1">
-            <a:schemeClr val="accent1"/>
-          </a:lnRef>
-          <a:fillRef idx="3">
-            <a:schemeClr val="accent1"/>
-          </a:fillRef>
-          <a:effectRef idx="2">
-            <a:schemeClr val="accent1"/>
-          </a:effectRef>
-          <a:fontRef idx="minor">
-            <a:schemeClr val="lt1"/>
-          </a:fontRef>
-        </p:style>
-        <p:txBody>
-          <a:bodyPr rtlCol="0" anchor="ctr"/>
-          <a:lstStyle/>
-          <a:p>
-            <a:pPr algn="ctr"/>
-          </a:p>
-        </p:txBody>
-      </p:sp>
-      <p:sp>
-        <p:nvSpPr>
-          <p:cNvPr id="9" name="build:ghost"/>
-          <p:cNvSpPr txBox="1"/>
-          <p:nvPr/>
-        </p:nvSpPr>
-        <p:spPr>
-          <a:xfrm>
-            <a:off x="566928" y="4398867"/>
-            <a:ext cx="11057839" cy="254000"/>
-          </a:xfrm>
-          <a:prstGeom prst="rect">
-            <a:avLst/>
-          </a:prstGeom>
-          <a:noFill/>
-        </p:spPr>
-        <p:txBody>
-          <a:bodyPr wrap="none" lIns="0" rIns="0" tIns="0" bIns="0">
-            <a:noAutofit/>
-          </a:bodyPr>
-          <a:lstStyle/>
-          <a:p>
-            <a:r>
-              <a:rPr sz="1600" b="1">
-                <a:solidFill>
-                  <a:srgbClr val="C1C9C5"/>
-                </a:solidFill>
-                <a:latin typeface="Avenir Next"/>
-                <a:ea typeface="Hiragino Sans"/>
-                <a:cs typeface="Hiragino Sans"/>
-              </a:rPr>
-              <a:t>③ 実部と虚部｜P = V_sV_r sin δ/X、Q_r = (V_sV_r cos δ − V_r²)/X</a:t>
-            </a:r>
-          </a:p>
-        </p:txBody>
-      </p:sp>
-      <p:sp>
-        <p:nvSpPr>
-          <p:cNvPr id="10" name="build:ghost"/>
-          <p:cNvSpPr txBox="1"/>
-          <p:nvPr/>
-        </p:nvSpPr>
-        <p:spPr>
-          <a:xfrm>
-            <a:off x="822960" y="4690967"/>
-            <a:ext cx="10801807" cy="385762"/>
-          </a:xfrm>
-          <a:prstGeom prst="rect">
-            <a:avLst/>
-          </a:prstGeom>
-          <a:noFill/>
-        </p:spPr>
-        <p:txBody>
-          <a:bodyPr wrap="square" lIns="0" rIns="0" tIns="0" bIns="0">
-            <a:noAutofit/>
-          </a:bodyPr>
-          <a:lstStyle/>
-          <a:p>
-            <a:pPr>
-              <a:lnSpc>
-                <a:spcPct val="130000"/>
-              </a:lnSpc>
-            </a:pPr>
-            <a:r>
-              <a:rPr sz="1500">
-                <a:solidFill>
-                  <a:srgbClr val="C1BCBB"/>
-                </a:solidFill>
-                <a:latin typeface="Avenir Next"/>
-                <a:ea typeface="Hiragino Sans"/>
-                <a:cs typeface="Hiragino Sans"/>
-              </a:rPr>
-              <a:t>δ が小さいと sin δ ≒ δ、cos δ ≒ 1 なので </a:t>
-            </a:r>
-            <a:r>
-              <a:rPr sz="1500" b="1">
-                <a:solidFill>
-                  <a:srgbClr val="C1BCBB"/>
-                </a:solidFill>
-                <a:latin typeface="Avenir Next"/>
-                <a:ea typeface="Hiragino Sans"/>
-                <a:cs typeface="Hiragino Sans"/>
-              </a:rPr>
-              <a:t>P ≒ V_sV_r δ/X、Q_r ≒ V_r (V_s − V_r)/X</a:t>
-            </a:r>
-            <a:r>
-              <a:rPr sz="1500">
-                <a:solidFill>
-                  <a:srgbClr val="C1BCBB"/>
-                </a:solidFill>
-                <a:latin typeface="Avenir Next"/>
-                <a:ea typeface="Hiragino Sans"/>
-                <a:cs typeface="Hiragino Sans"/>
-              </a:rPr>
-              <a:t>。P は δ、Q は電圧差で決まる。</a:t>
-            </a:r>
-          </a:p>
-        </p:txBody>
-      </p:sp>
-      <p:sp>
-        <p:nvSpPr>
-          <p:cNvPr id="11" name="TextBox 10"/>
+            <a:r>
+              <a:rPr sz="1400">
+                <a:solidFill>
+                  <a:srgbClr val="71635B"/>
+                </a:solidFill>
+                <a:latin typeface="Avenir Next"/>
+                <a:ea typeface="Hiragino Sans"/>
+                <a:cs typeface="Hiragino Sans"/>
+              </a:rPr>
+              <a:t>1/(−j) = j とオイラーの公式 e^{−jδ} = cos δ − j sin δ で S_r = j V_r (V_s cos δ − j V_s sin δ − V_r)/X。　出典｜コード/fig_ch03.py</a:t>
+            </a:r>
+          </a:p>
+        </p:txBody>
+      </p:sp>
+      <p:sp>
+        <p:nvSpPr>
+          <p:cNvPr id="5" name="TextBox 4"/>
           <p:cNvSpPr txBox="1"/>
           <p:nvPr/>
         </p:nvSpPr>
@@ -20146,59 +18000,14 @@
       <p:grpSpPr/>
       <p:sp>
         <p:nvSpPr>
-          <p:cNvPr id="2" name="TextBox 1"/>
+          <p:cNvPr id="2" name="edge:title"/>
           <p:cNvSpPr txBox="1"/>
           <p:nvPr/>
         </p:nvSpPr>
         <p:spPr>
           <a:xfrm>
-            <a:off x="566928" y="457200"/>
-            <a:ext cx="11057839" cy="658368"/>
-          </a:xfrm>
-          <a:prstGeom prst="rect">
-            <a:avLst/>
-          </a:prstGeom>
-          <a:noFill/>
-        </p:spPr>
-        <p:txBody>
-          <a:bodyPr wrap="square" lIns="0" rIns="0" tIns="0" bIns="0" anchor="ctr">
-            <a:noAutofit/>
-          </a:bodyPr>
-          <a:lstStyle/>
-          <a:p>
-            <a:pPr>
-              <a:lnSpc>
-                <a:spcPct val="106000"/>
-              </a:lnSpc>
-              <a:defRPr sz="3390" b="1">
-                <a:solidFill>
-                  <a:srgbClr val="7C332A"/>
-                </a:solidFill>
-                <a:latin typeface="Avenir Next"/>
-                <a:ea typeface="Hiragino Sans"/>
-                <a:cs typeface="Hiragino Sans"/>
-              </a:defRPr>
-            </a:pPr>
-            <a:r>
-              <a:rPr>
-                <a:ea typeface="Hiragino Sans"/>
-                <a:cs typeface="Hiragino Sans"/>
-              </a:rPr>
-              <a:t>導出 — 送電電力式 P と Q_r</a:t>
-            </a:r>
-          </a:p>
-        </p:txBody>
-      </p:sp>
-      <p:sp>
-        <p:nvSpPr>
-          <p:cNvPr id="3" name="TextBox 2"/>
-          <p:cNvSpPr txBox="1"/>
-          <p:nvPr/>
-        </p:nvSpPr>
-        <p:spPr>
-          <a:xfrm>
-            <a:off x="566928" y="2384775"/>
-            <a:ext cx="11057839" cy="254000"/>
+            <a:off x="566928" y="146304"/>
+            <a:ext cx="11057839" cy="457200"/>
           </a:xfrm>
           <a:prstGeom prst="rect">
             <a:avLst/>
@@ -20211,30 +18020,60 @@
           </a:bodyPr>
           <a:lstStyle/>
           <a:p>
-            <a:r>
-              <a:rPr sz="1600" b="1">
-                <a:solidFill>
-                  <a:srgbClr val="5C7268"/>
-                </a:solidFill>
-                <a:latin typeface="Avenir Next"/>
-                <a:ea typeface="Hiragino Sans"/>
-                <a:cs typeface="Hiragino Sans"/>
-              </a:rPr>
-              <a:t>① 電流｜İ = (V_s∠δ − V_r)/(jX)（R ≒ 0 の架空線）</a:t>
-            </a:r>
-          </a:p>
-        </p:txBody>
-      </p:sp>
-      <p:sp>
-        <p:nvSpPr>
-          <p:cNvPr id="4" name="TextBox 3"/>
+            <a:pPr>
+              <a:defRPr sz="2400" b="1">
+                <a:solidFill>
+                  <a:srgbClr val="7C332A"/>
+                </a:solidFill>
+                <a:latin typeface="Avenir Next"/>
+                <a:ea typeface="Hiragino Sans"/>
+                <a:cs typeface="Hiragino Sans"/>
+              </a:defRPr>
+            </a:pPr>
+            <a:r>
+              <a:rPr>
+                <a:ea typeface="Hiragino Sans"/>
+                <a:cs typeface="Hiragino Sans"/>
+              </a:rPr>
+              <a:t>導出 — 送電電力式 P と Q_r</a:t>
+            </a:r>
+          </a:p>
+        </p:txBody>
+      </p:sp>
+      <p:pic>
+        <p:nvPicPr>
+          <p:cNvPr id="3" name="Picture 2" descr="ch03_deriv_ptrans_3.png"/>
+          <p:cNvPicPr>
+            <a:picLocks noChangeAspect="1"/>
+          </p:cNvPicPr>
+          <p:nvPr/>
+        </p:nvPicPr>
+        <p:blipFill>
+          <a:blip r:embed="rId2"/>
+          <a:stretch>
+            <a:fillRect/>
+          </a:stretch>
+        </p:blipFill>
+        <p:spPr>
+          <a:xfrm>
+            <a:off x="762110" y="713232"/>
+            <a:ext cx="10667474" cy="5322316"/>
+          </a:xfrm>
+          <a:prstGeom prst="rect">
+            <a:avLst/>
+          </a:prstGeom>
+        </p:spPr>
+      </p:pic>
+      <p:sp>
+        <p:nvSpPr>
+          <p:cNvPr id="4" name="edge:caption"/>
           <p:cNvSpPr txBox="1"/>
           <p:nvPr/>
         </p:nvSpPr>
         <p:spPr>
           <a:xfrm>
-            <a:off x="822960" y="2676875"/>
-            <a:ext cx="10801807" cy="385762"/>
+            <a:off x="228600" y="6090412"/>
+            <a:ext cx="11734495" cy="520700"/>
           </a:xfrm>
           <a:prstGeom prst="rect">
             <a:avLst/>
@@ -20247,314 +18086,24 @@
           </a:bodyPr>
           <a:lstStyle/>
           <a:p>
-            <a:pPr>
-              <a:lnSpc>
-                <a:spcPct val="130000"/>
-              </a:lnSpc>
-            </a:pPr>
-            <a:r>
-              <a:rPr sz="1500">
-                <a:solidFill>
-                  <a:srgbClr val="33221E"/>
-                </a:solidFill>
-                <a:latin typeface="Avenir Next"/>
-                <a:ea typeface="Hiragino Sans"/>
-                <a:cs typeface="Hiragino Sans"/>
-              </a:rPr>
-              <a:t>送電端 V̇_s = V_s∠δ、受電端 V̇_r = V_r∠0。電圧の差をリアクタンスで割る。δ は 2 母線の位相のずれ（相差角）。</a:t>
-            </a:r>
-          </a:p>
-        </p:txBody>
-      </p:sp>
-      <p:sp>
-        <p:nvSpPr>
-          <p:cNvPr id="5" name="Rectangle 4"/>
-          <p:cNvSpPr/>
-          <p:nvPr/>
-        </p:nvSpPr>
-        <p:spPr>
-          <a:xfrm>
-            <a:off x="566928" y="3214529"/>
-            <a:ext cx="11057839" cy="9525"/>
-          </a:xfrm>
-          <a:prstGeom prst="rect">
-            <a:avLst/>
-          </a:prstGeom>
-          <a:solidFill>
-            <a:srgbClr val="E5DCCE"/>
-          </a:solidFill>
-          <a:ln>
-            <a:noFill/>
-          </a:ln>
-          <a:effectLst/>
-        </p:spPr>
-        <p:style>
-          <a:lnRef idx="1">
-            <a:schemeClr val="accent1"/>
-          </a:lnRef>
-          <a:fillRef idx="3">
-            <a:schemeClr val="accent1"/>
-          </a:fillRef>
-          <a:effectRef idx="2">
-            <a:schemeClr val="accent1"/>
-          </a:effectRef>
-          <a:fontRef idx="minor">
-            <a:schemeClr val="lt1"/>
-          </a:fontRef>
-        </p:style>
-        <p:txBody>
-          <a:bodyPr rtlCol="0" anchor="ctr"/>
-          <a:lstStyle/>
-          <a:p>
             <a:pPr algn="ctr"/>
-          </a:p>
-        </p:txBody>
-      </p:sp>
-      <p:sp>
-        <p:nvSpPr>
-          <p:cNvPr id="6" name="TextBox 5"/>
-          <p:cNvSpPr txBox="1"/>
-          <p:nvPr/>
-        </p:nvSpPr>
-        <p:spPr>
-          <a:xfrm>
-            <a:off x="566928" y="3391821"/>
-            <a:ext cx="11057839" cy="254000"/>
-          </a:xfrm>
-          <a:prstGeom prst="rect">
-            <a:avLst/>
-          </a:prstGeom>
-          <a:noFill/>
-        </p:spPr>
-        <p:txBody>
-          <a:bodyPr wrap="none" lIns="0" rIns="0" tIns="0" bIns="0">
-            <a:noAutofit/>
-          </a:bodyPr>
-          <a:lstStyle/>
-          <a:p>
-            <a:r>
-              <a:rPr sz="1600" b="1">
-                <a:solidFill>
-                  <a:srgbClr val="5C7268"/>
-                </a:solidFill>
-                <a:latin typeface="Avenir Next"/>
-                <a:ea typeface="Hiragino Sans"/>
-                <a:cs typeface="Hiragino Sans"/>
-              </a:rPr>
-              <a:t>② 受電端の複素電力｜S_r = V̇_r İ* = V_r (V_s∠−δ − V_r)/(−jX)</a:t>
-            </a:r>
-          </a:p>
-        </p:txBody>
-      </p:sp>
-      <p:sp>
-        <p:nvSpPr>
-          <p:cNvPr id="7" name="TextBox 6"/>
-          <p:cNvSpPr txBox="1"/>
-          <p:nvPr/>
-        </p:nvSpPr>
-        <p:spPr>
-          <a:xfrm>
-            <a:off x="822960" y="3683921"/>
-            <a:ext cx="10801807" cy="385762"/>
-          </a:xfrm>
-          <a:prstGeom prst="rect">
-            <a:avLst/>
-          </a:prstGeom>
-          <a:noFill/>
-        </p:spPr>
-        <p:txBody>
-          <a:bodyPr wrap="square" lIns="0" rIns="0" tIns="0" bIns="0">
-            <a:noAutofit/>
-          </a:bodyPr>
-          <a:lstStyle/>
-          <a:p>
-            <a:pPr>
-              <a:lnSpc>
-                <a:spcPct val="130000"/>
-              </a:lnSpc>
-            </a:pPr>
-            <a:r>
-              <a:rPr sz="1500">
-                <a:solidFill>
-                  <a:srgbClr val="33221E"/>
-                </a:solidFill>
-                <a:latin typeface="Avenir Next"/>
-                <a:ea typeface="Hiragino Sans"/>
-                <a:cs typeface="Hiragino Sans"/>
-              </a:rPr>
-              <a:t>1/(−j) = j とオイラーの公式 e^{−jδ} = cos δ − j sin δ で </a:t>
-            </a:r>
-            <a:r>
-              <a:rPr sz="1500" b="1">
-                <a:solidFill>
-                  <a:srgbClr val="33221E"/>
-                </a:solidFill>
-                <a:latin typeface="Avenir Next"/>
-                <a:ea typeface="Hiragino Sans"/>
-                <a:cs typeface="Hiragino Sans"/>
-              </a:rPr>
-              <a:t>S_r = j V_r (V_s cos δ − j V_s sin δ − V_r)/X</a:t>
-            </a:r>
-            <a:r>
-              <a:rPr sz="1500">
-                <a:solidFill>
-                  <a:srgbClr val="33221E"/>
-                </a:solidFill>
-                <a:latin typeface="Avenir Next"/>
-                <a:ea typeface="Hiragino Sans"/>
-                <a:cs typeface="Hiragino Sans"/>
-              </a:rPr>
-              <a:t>。</a:t>
-            </a:r>
-          </a:p>
-        </p:txBody>
-      </p:sp>
-      <p:sp>
-        <p:nvSpPr>
-          <p:cNvPr id="8" name="Rectangle 7"/>
-          <p:cNvSpPr/>
-          <p:nvPr/>
-        </p:nvSpPr>
-        <p:spPr>
-          <a:xfrm>
-            <a:off x="566928" y="4221575"/>
-            <a:ext cx="11057839" cy="9525"/>
-          </a:xfrm>
-          <a:prstGeom prst="rect">
-            <a:avLst/>
-          </a:prstGeom>
-          <a:solidFill>
-            <a:srgbClr val="E5DCCE"/>
-          </a:solidFill>
-          <a:ln>
-            <a:noFill/>
-          </a:ln>
-          <a:effectLst/>
-        </p:spPr>
-        <p:style>
-          <a:lnRef idx="1">
-            <a:schemeClr val="accent1"/>
-          </a:lnRef>
-          <a:fillRef idx="3">
-            <a:schemeClr val="accent1"/>
-          </a:fillRef>
-          <a:effectRef idx="2">
-            <a:schemeClr val="accent1"/>
-          </a:effectRef>
-          <a:fontRef idx="minor">
-            <a:schemeClr val="lt1"/>
-          </a:fontRef>
-        </p:style>
-        <p:txBody>
-          <a:bodyPr rtlCol="0" anchor="ctr"/>
-          <a:lstStyle/>
-          <a:p>
-            <a:pPr algn="ctr"/>
-          </a:p>
-        </p:txBody>
-      </p:sp>
-      <p:sp>
-        <p:nvSpPr>
-          <p:cNvPr id="9" name="TextBox 8"/>
-          <p:cNvSpPr txBox="1"/>
-          <p:nvPr/>
-        </p:nvSpPr>
-        <p:spPr>
-          <a:xfrm>
-            <a:off x="566928" y="4398867"/>
-            <a:ext cx="11057839" cy="254000"/>
-          </a:xfrm>
-          <a:prstGeom prst="rect">
-            <a:avLst/>
-          </a:prstGeom>
-          <a:noFill/>
-        </p:spPr>
-        <p:txBody>
-          <a:bodyPr wrap="none" lIns="0" rIns="0" tIns="0" bIns="0">
-            <a:noAutofit/>
-          </a:bodyPr>
-          <a:lstStyle/>
-          <a:p>
-            <a:r>
-              <a:rPr sz="1600" b="1">
-                <a:solidFill>
-                  <a:srgbClr val="5C7268"/>
-                </a:solidFill>
-                <a:latin typeface="Avenir Next"/>
-                <a:ea typeface="Hiragino Sans"/>
-                <a:cs typeface="Hiragino Sans"/>
-              </a:rPr>
-              <a:t>③ 実部と虚部｜P = V_sV_r sin δ/X、Q_r = (V_sV_r cos δ − V_r²)/X</a:t>
-            </a:r>
-          </a:p>
-        </p:txBody>
-      </p:sp>
-      <p:sp>
-        <p:nvSpPr>
-          <p:cNvPr id="10" name="TextBox 9"/>
-          <p:cNvSpPr txBox="1"/>
-          <p:nvPr/>
-        </p:nvSpPr>
-        <p:spPr>
-          <a:xfrm>
-            <a:off x="822960" y="4690967"/>
-            <a:ext cx="10801807" cy="385762"/>
-          </a:xfrm>
-          <a:prstGeom prst="rect">
-            <a:avLst/>
-          </a:prstGeom>
-          <a:noFill/>
-        </p:spPr>
-        <p:txBody>
-          <a:bodyPr wrap="square" lIns="0" rIns="0" tIns="0" bIns="0">
-            <a:noAutofit/>
-          </a:bodyPr>
-          <a:lstStyle/>
-          <a:p>
-            <a:pPr>
-              <a:lnSpc>
-                <a:spcPct val="130000"/>
-              </a:lnSpc>
-            </a:pPr>
-            <a:r>
-              <a:rPr sz="1500">
-                <a:solidFill>
-                  <a:srgbClr val="33221E"/>
-                </a:solidFill>
-                <a:latin typeface="Avenir Next"/>
-                <a:ea typeface="Hiragino Sans"/>
-                <a:cs typeface="Hiragino Sans"/>
-              </a:rPr>
-              <a:t>δ が小さいと sin δ ≒ δ、cos δ ≒ 1 なので </a:t>
-            </a:r>
-            <a:r>
-              <a:rPr sz="1500" b="1">
-                <a:solidFill>
-                  <a:srgbClr val="33221E"/>
-                </a:solidFill>
-                <a:latin typeface="Avenir Next"/>
-                <a:ea typeface="Hiragino Sans"/>
-                <a:cs typeface="Hiragino Sans"/>
-              </a:rPr>
-              <a:t>P ≒ V_sV_r δ/X、Q_r ≒ V_r (V_s − V_r)/X</a:t>
-            </a:r>
-            <a:r>
-              <a:rPr sz="1500">
-                <a:solidFill>
-                  <a:srgbClr val="33221E"/>
-                </a:solidFill>
-                <a:latin typeface="Avenir Next"/>
-                <a:ea typeface="Hiragino Sans"/>
-                <a:cs typeface="Hiragino Sans"/>
-              </a:rPr>
-              <a:t>。P は δ、Q は電圧差で決まる。</a:t>
-            </a:r>
-          </a:p>
-        </p:txBody>
-      </p:sp>
-      <p:sp>
-        <p:nvSpPr>
-          <p:cNvPr id="11" name="TextBox 10"/>
+            <a:r>
+              <a:rPr sz="1400">
+                <a:solidFill>
+                  <a:srgbClr val="71635B"/>
+                </a:solidFill>
+                <a:latin typeface="Avenir Next"/>
+                <a:ea typeface="Hiragino Sans"/>
+                <a:cs typeface="Hiragino Sans"/>
+              </a:rPr>
+              <a:t>δ が小さいと sin δ ≒ δ、cos δ ≒ 1 なので P ≒ V_sV_r δ/X、Q_r ≒ V_r (V_s − V_r)/X。P は δ、Q は電圧差で決まる。　出典｜コード/fig_ch03.py</a:t>
+            </a:r>
+          </a:p>
+        </p:txBody>
+      </p:sp>
+      <p:sp>
+        <p:nvSpPr>
+          <p:cNvPr id="5" name="TextBox 4"/>
           <p:cNvSpPr txBox="1"/>
           <p:nvPr/>
         </p:nvSpPr>
@@ -25327,59 +22876,14 @@
       <p:grpSpPr/>
       <p:sp>
         <p:nvSpPr>
-          <p:cNvPr id="2" name="TextBox 1"/>
+          <p:cNvPr id="2" name="edge:title"/>
           <p:cNvSpPr txBox="1"/>
           <p:nvPr/>
         </p:nvSpPr>
         <p:spPr>
           <a:xfrm>
-            <a:off x="566928" y="457200"/>
-            <a:ext cx="11057839" cy="658368"/>
-          </a:xfrm>
-          <a:prstGeom prst="rect">
-            <a:avLst/>
-          </a:prstGeom>
-          <a:noFill/>
-        </p:spPr>
-        <p:txBody>
-          <a:bodyPr wrap="square" lIns="0" rIns="0" tIns="0" bIns="0" anchor="ctr">
-            <a:noAutofit/>
-          </a:bodyPr>
-          <a:lstStyle/>
-          <a:p>
-            <a:pPr>
-              <a:lnSpc>
-                <a:spcPct val="106000"/>
-              </a:lnSpc>
-              <a:defRPr sz="3390" b="1">
-                <a:solidFill>
-                  <a:srgbClr val="7C332A"/>
-                </a:solidFill>
-                <a:latin typeface="Avenir Next"/>
-                <a:ea typeface="Hiragino Sans"/>
-                <a:cs typeface="Hiragino Sans"/>
-              </a:defRPr>
-            </a:pPr>
-            <a:r>
-              <a:rPr>
-                <a:ea typeface="Hiragino Sans"/>
-                <a:cs typeface="Hiragino Sans"/>
-              </a:rPr>
-              <a:t>導出 — v·i から S = P + jQ へ</a:t>
-            </a:r>
-          </a:p>
-        </p:txBody>
-      </p:sp>
-      <p:sp>
-        <p:nvSpPr>
-          <p:cNvPr id="3" name="TextBox 2"/>
-          <p:cNvSpPr txBox="1"/>
-          <p:nvPr/>
-        </p:nvSpPr>
-        <p:spPr>
-          <a:xfrm>
-            <a:off x="566928" y="2075212"/>
-            <a:ext cx="11057839" cy="254000"/>
+            <a:off x="566928" y="146304"/>
+            <a:ext cx="11057839" cy="457200"/>
           </a:xfrm>
           <a:prstGeom prst="rect">
             <a:avLst/>
@@ -25392,30 +22896,60 @@
           </a:bodyPr>
           <a:lstStyle/>
           <a:p>
-            <a:r>
-              <a:rPr sz="1600" b="1">
-                <a:solidFill>
-                  <a:srgbClr val="5C7268"/>
-                </a:solidFill>
-                <a:latin typeface="Avenir Next"/>
-                <a:ea typeface="Hiragino Sans"/>
-                <a:cs typeface="Hiragino Sans"/>
-              </a:rPr>
-              <a:t>① 瞬時電力｜v = √2 V sin ωt、i = √2 I sin(ωt − φ) の積</a:t>
-            </a:r>
-          </a:p>
-        </p:txBody>
-      </p:sp>
-      <p:sp>
-        <p:nvSpPr>
-          <p:cNvPr id="4" name="TextBox 3"/>
+            <a:pPr>
+              <a:defRPr sz="2400" b="1">
+                <a:solidFill>
+                  <a:srgbClr val="7C332A"/>
+                </a:solidFill>
+                <a:latin typeface="Avenir Next"/>
+                <a:ea typeface="Hiragino Sans"/>
+                <a:cs typeface="Hiragino Sans"/>
+              </a:defRPr>
+            </a:pPr>
+            <a:r>
+              <a:rPr>
+                <a:ea typeface="Hiragino Sans"/>
+                <a:cs typeface="Hiragino Sans"/>
+              </a:rPr>
+              <a:t>導出 — v·i から S = P + jQ へ</a:t>
+            </a:r>
+          </a:p>
+        </p:txBody>
+      </p:sp>
+      <p:pic>
+        <p:nvPicPr>
+          <p:cNvPr id="3" name="Picture 2" descr="ch03_deriv_spower_1.png"/>
+          <p:cNvPicPr>
+            <a:picLocks noChangeAspect="1"/>
+          </p:cNvPicPr>
+          <p:nvPr/>
+        </p:nvPicPr>
+        <p:blipFill>
+          <a:blip r:embed="rId2"/>
+          <a:stretch>
+            <a:fillRect/>
+          </a:stretch>
+        </p:blipFill>
+        <p:spPr>
+          <a:xfrm>
+            <a:off x="762110" y="713232"/>
+            <a:ext cx="10667474" cy="5322316"/>
+          </a:xfrm>
+          <a:prstGeom prst="rect">
+            <a:avLst/>
+          </a:prstGeom>
+        </p:spPr>
+      </p:pic>
+      <p:sp>
+        <p:nvSpPr>
+          <p:cNvPr id="4" name="edge:caption"/>
           <p:cNvSpPr txBox="1"/>
           <p:nvPr/>
         </p:nvSpPr>
         <p:spPr>
           <a:xfrm>
-            <a:off x="822960" y="2367312"/>
-            <a:ext cx="10801807" cy="695325"/>
+            <a:off x="228600" y="6090412"/>
+            <a:ext cx="11734495" cy="520700"/>
           </a:xfrm>
           <a:prstGeom prst="rect">
             <a:avLst/>
@@ -25428,303 +22962,24 @@
           </a:bodyPr>
           <a:lstStyle/>
           <a:p>
-            <a:pPr>
-              <a:lnSpc>
-                <a:spcPct val="130000"/>
-              </a:lnSpc>
-            </a:pPr>
-            <a:r>
-              <a:rPr sz="1500">
-                <a:solidFill>
-                  <a:srgbClr val="33221E"/>
-                </a:solidFill>
-                <a:latin typeface="Avenir Next"/>
-                <a:ea typeface="Hiragino Sans"/>
-                <a:cs typeface="Hiragino Sans"/>
-              </a:rPr>
-              <a:t>積和の公式 2 sinA sinB = cos(A − B) − cos(A + B) より p(t) = VI cos φ − VI cos(2ωt − φ)。平均は VI cos φ で、これが有効電力 P。</a:t>
-            </a:r>
-          </a:p>
-        </p:txBody>
-      </p:sp>
-      <p:sp>
-        <p:nvSpPr>
-          <p:cNvPr id="5" name="Rectangle 4"/>
-          <p:cNvSpPr/>
-          <p:nvPr/>
-        </p:nvSpPr>
-        <p:spPr>
-          <a:xfrm>
-            <a:off x="566928" y="3214529"/>
-            <a:ext cx="11057839" cy="9525"/>
-          </a:xfrm>
-          <a:prstGeom prst="rect">
-            <a:avLst/>
-          </a:prstGeom>
-          <a:solidFill>
-            <a:srgbClr val="E5DCCE"/>
-          </a:solidFill>
-          <a:ln>
-            <a:noFill/>
-          </a:ln>
-          <a:effectLst/>
-        </p:spPr>
-        <p:style>
-          <a:lnRef idx="1">
-            <a:schemeClr val="accent1"/>
-          </a:lnRef>
-          <a:fillRef idx="3">
-            <a:schemeClr val="accent1"/>
-          </a:fillRef>
-          <a:effectRef idx="2">
-            <a:schemeClr val="accent1"/>
-          </a:effectRef>
-          <a:fontRef idx="minor">
-            <a:schemeClr val="lt1"/>
-          </a:fontRef>
-        </p:style>
-        <p:txBody>
-          <a:bodyPr rtlCol="0" anchor="ctr"/>
-          <a:lstStyle/>
-          <a:p>
             <a:pPr algn="ctr"/>
-          </a:p>
-        </p:txBody>
-      </p:sp>
-      <p:sp>
-        <p:nvSpPr>
-          <p:cNvPr id="6" name="build:ghost"/>
-          <p:cNvSpPr txBox="1"/>
-          <p:nvPr/>
-        </p:nvSpPr>
-        <p:spPr>
-          <a:xfrm>
-            <a:off x="566928" y="3391821"/>
-            <a:ext cx="11057839" cy="254000"/>
-          </a:xfrm>
-          <a:prstGeom prst="rect">
-            <a:avLst/>
-          </a:prstGeom>
-          <a:noFill/>
-        </p:spPr>
-        <p:txBody>
-          <a:bodyPr wrap="none" lIns="0" rIns="0" tIns="0" bIns="0">
-            <a:noAutofit/>
-          </a:bodyPr>
-          <a:lstStyle/>
-          <a:p>
-            <a:r>
-              <a:rPr sz="1600" b="1">
-                <a:solidFill>
-                  <a:srgbClr val="C1C9C5"/>
-                </a:solidFill>
-                <a:latin typeface="Avenir Next"/>
-                <a:ea typeface="Hiragino Sans"/>
-                <a:cs typeface="Hiragino Sans"/>
-              </a:rPr>
-              <a:t>② 分解｜cos(2ωt − φ) を展開して 2 つの項に分ける</a:t>
-            </a:r>
-          </a:p>
-        </p:txBody>
-      </p:sp>
-      <p:sp>
-        <p:nvSpPr>
-          <p:cNvPr id="7" name="build:ghost"/>
-          <p:cNvSpPr txBox="1"/>
-          <p:nvPr/>
-        </p:nvSpPr>
-        <p:spPr>
-          <a:xfrm>
-            <a:off x="822960" y="3683921"/>
-            <a:ext cx="10801807" cy="385762"/>
-          </a:xfrm>
-          <a:prstGeom prst="rect">
-            <a:avLst/>
-          </a:prstGeom>
-          <a:noFill/>
-        </p:spPr>
-        <p:txBody>
-          <a:bodyPr wrap="square" lIns="0" rIns="0" tIns="0" bIns="0">
-            <a:noAutofit/>
-          </a:bodyPr>
-          <a:lstStyle/>
-          <a:p>
-            <a:pPr>
-              <a:lnSpc>
-                <a:spcPct val="130000"/>
-              </a:lnSpc>
-            </a:pPr>
-            <a:r>
-              <a:rPr sz="1500" b="1">
-                <a:solidFill>
-                  <a:srgbClr val="C1BCBB"/>
-                </a:solidFill>
-                <a:latin typeface="Avenir Next"/>
-                <a:ea typeface="Hiragino Sans"/>
-                <a:cs typeface="Hiragino Sans"/>
-              </a:rPr>
-              <a:t>p(t) = P(1 − cos 2ωt) − Q sin 2ωt</a:t>
-            </a:r>
-            <a:r>
-              <a:rPr sz="1500">
-                <a:solidFill>
-                  <a:srgbClr val="C1BCBB"/>
-                </a:solidFill>
-                <a:latin typeface="Avenir Next"/>
-                <a:ea typeface="Hiragino Sans"/>
-                <a:cs typeface="Hiragino Sans"/>
-              </a:rPr>
-              <a:t>、P = VI cos φ、Q = VI sin φ。第 1 項は常に 0 以上で平均 P。第 2 項は平均 0 で振幅 Q。</a:t>
-            </a:r>
-          </a:p>
-        </p:txBody>
-      </p:sp>
-      <p:sp>
-        <p:nvSpPr>
-          <p:cNvPr id="8" name="Rectangle 7"/>
-          <p:cNvSpPr/>
-          <p:nvPr/>
-        </p:nvSpPr>
-        <p:spPr>
-          <a:xfrm>
-            <a:off x="566928" y="4221575"/>
-            <a:ext cx="11057839" cy="9525"/>
-          </a:xfrm>
-          <a:prstGeom prst="rect">
-            <a:avLst/>
-          </a:prstGeom>
-          <a:solidFill>
-            <a:srgbClr val="E5DCCE"/>
-          </a:solidFill>
-          <a:ln>
-            <a:noFill/>
-          </a:ln>
-          <a:effectLst/>
-        </p:spPr>
-        <p:style>
-          <a:lnRef idx="1">
-            <a:schemeClr val="accent1"/>
-          </a:lnRef>
-          <a:fillRef idx="3">
-            <a:schemeClr val="accent1"/>
-          </a:fillRef>
-          <a:effectRef idx="2">
-            <a:schemeClr val="accent1"/>
-          </a:effectRef>
-          <a:fontRef idx="minor">
-            <a:schemeClr val="lt1"/>
-          </a:fontRef>
-        </p:style>
-        <p:txBody>
-          <a:bodyPr rtlCol="0" anchor="ctr"/>
-          <a:lstStyle/>
-          <a:p>
-            <a:pPr algn="ctr"/>
-          </a:p>
-        </p:txBody>
-      </p:sp>
-      <p:sp>
-        <p:nvSpPr>
-          <p:cNvPr id="9" name="build:ghost"/>
-          <p:cNvSpPr txBox="1"/>
-          <p:nvPr/>
-        </p:nvSpPr>
-        <p:spPr>
-          <a:xfrm>
-            <a:off x="566928" y="4398867"/>
-            <a:ext cx="11057839" cy="254000"/>
-          </a:xfrm>
-          <a:prstGeom prst="rect">
-            <a:avLst/>
-          </a:prstGeom>
-          <a:noFill/>
-        </p:spPr>
-        <p:txBody>
-          <a:bodyPr wrap="none" lIns="0" rIns="0" tIns="0" bIns="0">
-            <a:noAutofit/>
-          </a:bodyPr>
-          <a:lstStyle/>
-          <a:p>
-            <a:r>
-              <a:rPr sz="1600" b="1">
-                <a:solidFill>
-                  <a:srgbClr val="C1C9C5"/>
-                </a:solidFill>
-                <a:latin typeface="Avenir Next"/>
-                <a:ea typeface="Hiragino Sans"/>
-                <a:cs typeface="Hiragino Sans"/>
-              </a:rPr>
-              <a:t>③ フェーザで｜S = V̇ İ* = VI∠(θ_v − θ_i) = VI∠φ</a:t>
-            </a:r>
-          </a:p>
-        </p:txBody>
-      </p:sp>
-      <p:sp>
-        <p:nvSpPr>
-          <p:cNvPr id="10" name="build:ghost"/>
-          <p:cNvSpPr txBox="1"/>
-          <p:nvPr/>
-        </p:nvSpPr>
-        <p:spPr>
-          <a:xfrm>
-            <a:off x="822960" y="4690967"/>
-            <a:ext cx="10801807" cy="695325"/>
-          </a:xfrm>
-          <a:prstGeom prst="rect">
-            <a:avLst/>
-          </a:prstGeom>
-          <a:noFill/>
-        </p:spPr>
-        <p:txBody>
-          <a:bodyPr wrap="square" lIns="0" rIns="0" tIns="0" bIns="0">
-            <a:noAutofit/>
-          </a:bodyPr>
-          <a:lstStyle/>
-          <a:p>
-            <a:pPr>
-              <a:lnSpc>
-                <a:spcPct val="130000"/>
-              </a:lnSpc>
-            </a:pPr>
-            <a:r>
-              <a:rPr sz="1500">
-                <a:solidFill>
-                  <a:srgbClr val="C1BCBB"/>
-                </a:solidFill>
-                <a:latin typeface="Avenir Next"/>
-                <a:ea typeface="Hiragino Sans"/>
-                <a:cs typeface="Hiragino Sans"/>
-              </a:rPr>
-              <a:t>共役を取るから角度が φ になる。</a:t>
-            </a:r>
-            <a:r>
-              <a:rPr sz="1500" b="1">
-                <a:solidFill>
-                  <a:srgbClr val="C1BCBB"/>
-                </a:solidFill>
-                <a:latin typeface="Avenir Next"/>
-                <a:ea typeface="Hiragino Sans"/>
-                <a:cs typeface="Hiragino Sans"/>
-              </a:rPr>
-              <a:t>S = VI cos φ + j VI sin φ = P + jQ</a:t>
-            </a:r>
-            <a:r>
-              <a:rPr sz="1500">
-                <a:solidFill>
-                  <a:srgbClr val="C1BCBB"/>
-                </a:solidFill>
-                <a:latin typeface="Avenir Next"/>
-                <a:ea typeface="Hiragino Sans"/>
-                <a:cs typeface="Hiragino Sans"/>
-              </a:rPr>
-              <a:t>。遅れ負荷（誘導性）は Q &gt; 0、進み（コンデンサ）は Q &lt; 0 と約束する。</a:t>
-            </a:r>
-          </a:p>
-        </p:txBody>
-      </p:sp>
-      <p:sp>
-        <p:nvSpPr>
-          <p:cNvPr id="11" name="TextBox 10"/>
+            <a:r>
+              <a:rPr sz="1400">
+                <a:solidFill>
+                  <a:srgbClr val="71635B"/>
+                </a:solidFill>
+                <a:latin typeface="Avenir Next"/>
+                <a:ea typeface="Hiragino Sans"/>
+                <a:cs typeface="Hiragino Sans"/>
+              </a:rPr>
+              <a:t>積和の公式 2 sinA sinB = cos(A − B) − cos(A + B) より p(t) = VI cos φ − VI cos(2ωt − φ)。平均は VI cos φ で、これが有効電力 P。　出典｜コード/fig_ch03.py</a:t>
+            </a:r>
+          </a:p>
+        </p:txBody>
+      </p:sp>
+      <p:sp>
+        <p:nvSpPr>
+          <p:cNvPr id="5" name="TextBox 4"/>
           <p:cNvSpPr txBox="1"/>
           <p:nvPr/>
         </p:nvSpPr>
